--- a/documents/finance analytics presentation.pptx
+++ b/documents/finance analytics presentation.pptx
@@ -1,41 +1,42 @@
 
 <file path=ppt/presentation.xml><?xml version="1.0" encoding="utf-8"?>
-<p:presentation xmlns:a="http://schemas.openxmlformats.org/drawingml/2006/main" xmlns:r="http://schemas.openxmlformats.org/officeDocument/2006/relationships" xmlns:p="http://schemas.openxmlformats.org/presentationml/2006/main" saveSubsetFonts="1" embedTrueTypeFonts="true">
+<p:presentation xmlns:a="http://schemas.openxmlformats.org/drawingml/2006/main" xmlns:r="http://schemas.openxmlformats.org/officeDocument/2006/relationships" xmlns:p="http://schemas.openxmlformats.org/presentationml/2006/main" embedTrueTypeFonts="1" saveSubsetFonts="1">
   <p:sldMasterIdLst>
     <p:sldMasterId id="2147483648" r:id="rId1"/>
   </p:sldMasterIdLst>
   <p:sldIdLst>
-    <p:sldId id="256" r:id="rId6"/>
-    <p:sldId id="257" r:id="rId7"/>
-    <p:sldId id="258" r:id="rId8"/>
-    <p:sldId id="259" r:id="rId9"/>
-    <p:sldId id="260" r:id="rId10"/>
-    <p:sldId id="261" r:id="rId11"/>
-    <p:sldId id="262" r:id="rId12"/>
-    <p:sldId id="263" r:id="rId13"/>
+    <p:sldId id="256" r:id="rId2"/>
+    <p:sldId id="257" r:id="rId3"/>
+    <p:sldId id="258" r:id="rId4"/>
+    <p:sldId id="259" r:id="rId5"/>
+    <p:sldId id="260" r:id="rId6"/>
+    <p:sldId id="261" r:id="rId7"/>
+    <p:sldId id="262" r:id="rId8"/>
+    <p:sldId id="263" r:id="rId9"/>
+    <p:sldId id="264" r:id="rId10"/>
   </p:sldIdLst>
   <p:sldSz cx="18288000" cy="10287000"/>
   <p:notesSz cx="6858000" cy="9144000"/>
   <p:embeddedFontLst>
     <p:embeddedFont>
-      <p:font typeface="Josefin Sans" charset="1" panose="00000500000000000000"/>
+      <p:font typeface="Josefin Sans" pitchFamily="2" charset="0"/>
+      <p:regular r:id="rId11"/>
+    </p:embeddedFont>
+    <p:embeddedFont>
+      <p:font typeface="Josefin Sans Light" pitchFamily="2" charset="0"/>
+      <p:regular r:id="rId12"/>
+    </p:embeddedFont>
+    <p:embeddedFont>
+      <p:font typeface="Open Sans" panose="020B0606030504020204" pitchFamily="34" charset="0"/>
+      <p:regular r:id="rId13"/>
+    </p:embeddedFont>
+    <p:embeddedFont>
+      <p:font typeface="Open Sans Bold" panose="020B0806030504020204" charset="0"/>
       <p:regular r:id="rId14"/>
     </p:embeddedFont>
     <p:embeddedFont>
-      <p:font typeface="Josefin Sans Light" charset="1" panose="00000400000000000000"/>
+      <p:font typeface="Open Sans Light" panose="020B0306030504020204" pitchFamily="34" charset="0"/>
       <p:regular r:id="rId15"/>
-    </p:embeddedFont>
-    <p:embeddedFont>
-      <p:font typeface="Open Sans Light" charset="1" panose="00000000000000000000"/>
-      <p:regular r:id="rId16"/>
-    </p:embeddedFont>
-    <p:embeddedFont>
-      <p:font typeface="Open Sans Bold" charset="1" panose="00000000000000000000"/>
-      <p:regular r:id="rId17"/>
-    </p:embeddedFont>
-    <p:embeddedFont>
-      <p:font typeface="Open Sans" charset="1" panose="00000000000000000000"/>
-      <p:regular r:id="rId18"/>
     </p:embeddedFont>
   </p:embeddedFontLst>
   <p:defaultTextStyle>
@@ -133,7 +134,239 @@
       </a:defRPr>
     </a:lvl9pPr>
   </p:defaultTextStyle>
+  <p:extLst>
+    <p:ext uri="{EFAFB233-063F-42B5-8137-9DF3F51BA10A}">
+      <p15:sldGuideLst xmlns:p15="http://schemas.microsoft.com/office/powerpoint/2012/main">
+        <p15:guide id="1" orient="horz" pos="2160">
+          <p15:clr>
+            <a:srgbClr val="A4A3A4"/>
+          </p15:clr>
+        </p15:guide>
+        <p15:guide id="2" pos="2880">
+          <p15:clr>
+            <a:srgbClr val="A4A3A4"/>
+          </p15:clr>
+        </p15:guide>
+      </p15:sldGuideLst>
+    </p:ext>
+  </p:extLst>
 </p:presentation>
+</file>
+
+<file path=ppt/revisionInfo.xml><?xml version="1.0" encoding="utf-8"?>
+<p1510:revInfo xmlns:a="http://schemas.openxmlformats.org/drawingml/2006/main" xmlns:r="http://schemas.openxmlformats.org/officeDocument/2006/relationships" xmlns:p1510="http://schemas.microsoft.com/office/powerpoint/2015/10/main">
+  <p1510:revLst>
+    <p1510:client id="{CD4FFDA1-E554-4C80-929C-1CF343161DB5}" v="7" dt="2026-04-08T01:25:58.520"/>
+  </p1510:revLst>
+</p1510:revInfo>
+</file>
+
+<file path=ppt/changesInfos/changesInfo1.xml><?xml version="1.0" encoding="utf-8"?>
+<pc:chgInfo xmlns:a="http://schemas.openxmlformats.org/drawingml/2006/main" xmlns:r="http://schemas.openxmlformats.org/officeDocument/2006/relationships" xmlns:ac="http://schemas.microsoft.com/office/drawing/2013/main/command" xmlns:pc="http://schemas.microsoft.com/office/powerpoint/2013/main/command">
+  <pc:docChgLst>
+    <pc:chgData name="Muchammad Wildan Alkautsar" userId="360672ed2ee56274" providerId="LiveId" clId="{F5771622-C242-4EFB-9359-41E4DFBD7538}"/>
+    <pc:docChg chg="undo custSel addSld delSld modSld">
+      <pc:chgData name="Muchammad Wildan Alkautsar" userId="360672ed2ee56274" providerId="LiveId" clId="{F5771622-C242-4EFB-9359-41E4DFBD7538}" dt="2026-04-08T01:27:46.026" v="166" actId="2711"/>
+      <pc:docMkLst>
+        <pc:docMk/>
+      </pc:docMkLst>
+      <pc:sldChg chg="modSp mod">
+        <pc:chgData name="Muchammad Wildan Alkautsar" userId="360672ed2ee56274" providerId="LiveId" clId="{F5771622-C242-4EFB-9359-41E4DFBD7538}" dt="2026-04-08T01:21:32.075" v="133" actId="2711"/>
+        <pc:sldMkLst>
+          <pc:docMk/>
+          <pc:sldMk cId="0" sldId="256"/>
+        </pc:sldMkLst>
+        <pc:spChg chg="mod">
+          <ac:chgData name="Muchammad Wildan Alkautsar" userId="360672ed2ee56274" providerId="LiveId" clId="{F5771622-C242-4EFB-9359-41E4DFBD7538}" dt="2026-04-08T01:21:23.044" v="128" actId="2711"/>
+          <ac:spMkLst>
+            <pc:docMk/>
+            <pc:sldMk cId="0" sldId="256"/>
+            <ac:spMk id="9" creationId="{00000000-0000-0000-0000-000000000000}"/>
+          </ac:spMkLst>
+        </pc:spChg>
+        <pc:spChg chg="mod">
+          <ac:chgData name="Muchammad Wildan Alkautsar" userId="360672ed2ee56274" providerId="LiveId" clId="{F5771622-C242-4EFB-9359-41E4DFBD7538}" dt="2026-04-08T01:21:29.410" v="132" actId="2711"/>
+          <ac:spMkLst>
+            <pc:docMk/>
+            <pc:sldMk cId="0" sldId="256"/>
+            <ac:spMk id="10" creationId="{00000000-0000-0000-0000-000000000000}"/>
+          </ac:spMkLst>
+        </pc:spChg>
+        <pc:spChg chg="mod">
+          <ac:chgData name="Muchammad Wildan Alkautsar" userId="360672ed2ee56274" providerId="LiveId" clId="{F5771622-C242-4EFB-9359-41E4DFBD7538}" dt="2026-04-08T01:21:32.075" v="133" actId="2711"/>
+          <ac:spMkLst>
+            <pc:docMk/>
+            <pc:sldMk cId="0" sldId="256"/>
+            <ac:spMk id="11" creationId="{00000000-0000-0000-0000-000000000000}"/>
+          </ac:spMkLst>
+        </pc:spChg>
+      </pc:sldChg>
+      <pc:sldChg chg="modSp mod">
+        <pc:chgData name="Muchammad Wildan Alkautsar" userId="360672ed2ee56274" providerId="LiveId" clId="{F5771622-C242-4EFB-9359-41E4DFBD7538}" dt="2026-04-08T01:26:24.672" v="158" actId="2711"/>
+        <pc:sldMkLst>
+          <pc:docMk/>
+          <pc:sldMk cId="0" sldId="257"/>
+        </pc:sldMkLst>
+        <pc:spChg chg="mod">
+          <ac:chgData name="Muchammad Wildan Alkautsar" userId="360672ed2ee56274" providerId="LiveId" clId="{F5771622-C242-4EFB-9359-41E4DFBD7538}" dt="2026-04-08T01:21:20.059" v="127" actId="2711"/>
+          <ac:spMkLst>
+            <pc:docMk/>
+            <pc:sldMk cId="0" sldId="257"/>
+            <ac:spMk id="7" creationId="{00000000-0000-0000-0000-000000000000}"/>
+          </ac:spMkLst>
+        </pc:spChg>
+        <pc:spChg chg="mod">
+          <ac:chgData name="Muchammad Wildan Alkautsar" userId="360672ed2ee56274" providerId="LiveId" clId="{F5771622-C242-4EFB-9359-41E4DFBD7538}" dt="2026-04-08T01:26:24.672" v="158" actId="2711"/>
+          <ac:spMkLst>
+            <pc:docMk/>
+            <pc:sldMk cId="0" sldId="257"/>
+            <ac:spMk id="8" creationId="{00000000-0000-0000-0000-000000000000}"/>
+          </ac:spMkLst>
+        </pc:spChg>
+      </pc:sldChg>
+      <pc:sldChg chg="modSp mod">
+        <pc:chgData name="Muchammad Wildan Alkautsar" userId="360672ed2ee56274" providerId="LiveId" clId="{F5771622-C242-4EFB-9359-41E4DFBD7538}" dt="2026-04-08T01:27:46.026" v="166" actId="2711"/>
+        <pc:sldMkLst>
+          <pc:docMk/>
+          <pc:sldMk cId="0" sldId="258"/>
+        </pc:sldMkLst>
+        <pc:spChg chg="mod">
+          <ac:chgData name="Muchammad Wildan Alkautsar" userId="360672ed2ee56274" providerId="LiveId" clId="{F5771622-C242-4EFB-9359-41E4DFBD7538}" dt="2026-04-08T01:27:40.129" v="165" actId="2711"/>
+          <ac:spMkLst>
+            <pc:docMk/>
+            <pc:sldMk cId="0" sldId="258"/>
+            <ac:spMk id="5" creationId="{00000000-0000-0000-0000-000000000000}"/>
+          </ac:spMkLst>
+        </pc:spChg>
+        <pc:spChg chg="mod">
+          <ac:chgData name="Muchammad Wildan Alkautsar" userId="360672ed2ee56274" providerId="LiveId" clId="{F5771622-C242-4EFB-9359-41E4DFBD7538}" dt="2026-04-08T01:27:46.026" v="166" actId="2711"/>
+          <ac:spMkLst>
+            <pc:docMk/>
+            <pc:sldMk cId="0" sldId="258"/>
+            <ac:spMk id="6" creationId="{00000000-0000-0000-0000-000000000000}"/>
+          </ac:spMkLst>
+        </pc:spChg>
+        <pc:spChg chg="mod">
+          <ac:chgData name="Muchammad Wildan Alkautsar" userId="360672ed2ee56274" providerId="LiveId" clId="{F5771622-C242-4EFB-9359-41E4DFBD7538}" dt="2026-04-08T01:27:36.197" v="164" actId="2711"/>
+          <ac:spMkLst>
+            <pc:docMk/>
+            <pc:sldMk cId="0" sldId="258"/>
+            <ac:spMk id="7" creationId="{00000000-0000-0000-0000-000000000000}"/>
+          </ac:spMkLst>
+        </pc:spChg>
+        <pc:spChg chg="mod">
+          <ac:chgData name="Muchammad Wildan Alkautsar" userId="360672ed2ee56274" providerId="LiveId" clId="{F5771622-C242-4EFB-9359-41E4DFBD7538}" dt="2026-04-08T01:27:32.004" v="163" actId="2711"/>
+          <ac:spMkLst>
+            <pc:docMk/>
+            <pc:sldMk cId="0" sldId="258"/>
+            <ac:spMk id="8" creationId="{00000000-0000-0000-0000-000000000000}"/>
+          </ac:spMkLst>
+        </pc:spChg>
+      </pc:sldChg>
+      <pc:sldChg chg="addSp delSp modSp mod">
+        <pc:chgData name="Muchammad Wildan Alkautsar" userId="360672ed2ee56274" providerId="LiveId" clId="{F5771622-C242-4EFB-9359-41E4DFBD7538}" dt="2026-04-07T09:44:52.014" v="15" actId="14100"/>
+        <pc:sldMkLst>
+          <pc:docMk/>
+          <pc:sldMk cId="0" sldId="262"/>
+        </pc:sldMkLst>
+        <pc:spChg chg="add del">
+          <ac:chgData name="Muchammad Wildan Alkautsar" userId="360672ed2ee56274" providerId="LiveId" clId="{F5771622-C242-4EFB-9359-41E4DFBD7538}" dt="2026-04-07T09:44:48.554" v="12" actId="478"/>
+          <ac:spMkLst>
+            <pc:docMk/>
+            <pc:sldMk cId="0" sldId="262"/>
+            <ac:spMk id="8" creationId="{00000000-0000-0000-0000-000000000000}"/>
+          </ac:spMkLst>
+        </pc:spChg>
+        <pc:picChg chg="add del mod">
+          <ac:chgData name="Muchammad Wildan Alkautsar" userId="360672ed2ee56274" providerId="LiveId" clId="{F5771622-C242-4EFB-9359-41E4DFBD7538}" dt="2026-04-07T09:44:40.925" v="4" actId="22"/>
+          <ac:picMkLst>
+            <pc:docMk/>
+            <pc:sldMk cId="0" sldId="262"/>
+            <ac:picMk id="10" creationId="{2D7A1F32-2BB9-1940-EA19-0F04871E9835}"/>
+          </ac:picMkLst>
+        </pc:picChg>
+        <pc:picChg chg="add del">
+          <ac:chgData name="Muchammad Wildan Alkautsar" userId="360672ed2ee56274" providerId="LiveId" clId="{F5771622-C242-4EFB-9359-41E4DFBD7538}" dt="2026-04-07T09:44:43.498" v="7" actId="22"/>
+          <ac:picMkLst>
+            <pc:docMk/>
+            <pc:sldMk cId="0" sldId="262"/>
+            <ac:picMk id="12" creationId="{D072BA54-0389-D1D8-1C67-BC0A69024457}"/>
+          </ac:picMkLst>
+        </pc:picChg>
+        <pc:picChg chg="add del">
+          <ac:chgData name="Muchammad Wildan Alkautsar" userId="360672ed2ee56274" providerId="LiveId" clId="{F5771622-C242-4EFB-9359-41E4DFBD7538}" dt="2026-04-07T09:44:45.778" v="9" actId="22"/>
+          <ac:picMkLst>
+            <pc:docMk/>
+            <pc:sldMk cId="0" sldId="262"/>
+            <ac:picMk id="14" creationId="{88A16B35-8F59-72EA-AF7F-1BB0EF8BA21E}"/>
+          </ac:picMkLst>
+        </pc:picChg>
+        <pc:picChg chg="add del">
+          <ac:chgData name="Muchammad Wildan Alkautsar" userId="360672ed2ee56274" providerId="LiveId" clId="{F5771622-C242-4EFB-9359-41E4DFBD7538}" dt="2026-04-07T09:44:47.570" v="11" actId="22"/>
+          <ac:picMkLst>
+            <pc:docMk/>
+            <pc:sldMk cId="0" sldId="262"/>
+            <ac:picMk id="16" creationId="{92239236-F8FD-012B-EC80-55106999892C}"/>
+          </ac:picMkLst>
+        </pc:picChg>
+        <pc:picChg chg="add mod">
+          <ac:chgData name="Muchammad Wildan Alkautsar" userId="360672ed2ee56274" providerId="LiveId" clId="{F5771622-C242-4EFB-9359-41E4DFBD7538}" dt="2026-04-07T09:44:52.014" v="15" actId="14100"/>
+          <ac:picMkLst>
+            <pc:docMk/>
+            <pc:sldMk cId="0" sldId="262"/>
+            <ac:picMk id="18" creationId="{20555352-F20A-CC1A-B75B-571403C05E31}"/>
+          </ac:picMkLst>
+        </pc:picChg>
+      </pc:sldChg>
+      <pc:sldChg chg="addSp delSp modSp add mod modClrScheme chgLayout">
+        <pc:chgData name="Muchammad Wildan Alkautsar" userId="360672ed2ee56274" providerId="LiveId" clId="{F5771622-C242-4EFB-9359-41E4DFBD7538}" dt="2026-04-08T01:26:42.291" v="161" actId="113"/>
+        <pc:sldMkLst>
+          <pc:docMk/>
+          <pc:sldMk cId="1134590727" sldId="264"/>
+        </pc:sldMkLst>
+        <pc:spChg chg="del">
+          <ac:chgData name="Muchammad Wildan Alkautsar" userId="360672ed2ee56274" providerId="LiveId" clId="{F5771622-C242-4EFB-9359-41E4DFBD7538}" dt="2026-04-08T01:14:20.606" v="19" actId="478"/>
+          <ac:spMkLst>
+            <pc:docMk/>
+            <pc:sldMk cId="1134590727" sldId="264"/>
+            <ac:spMk id="4" creationId="{F4200446-2F99-7A6D-C2CD-5813DBF5F75C}"/>
+          </ac:spMkLst>
+        </pc:spChg>
+        <pc:spChg chg="del mod">
+          <ac:chgData name="Muchammad Wildan Alkautsar" userId="360672ed2ee56274" providerId="LiveId" clId="{F5771622-C242-4EFB-9359-41E4DFBD7538}" dt="2026-04-08T01:14:23.612" v="22"/>
+          <ac:spMkLst>
+            <pc:docMk/>
+            <pc:sldMk cId="1134590727" sldId="264"/>
+            <ac:spMk id="7" creationId="{732903B6-52D8-63F1-E94F-D3A0C5AD7D48}"/>
+          </ac:spMkLst>
+        </pc:spChg>
+        <pc:spChg chg="add mod ord">
+          <ac:chgData name="Muchammad Wildan Alkautsar" userId="360672ed2ee56274" providerId="LiveId" clId="{F5771622-C242-4EFB-9359-41E4DFBD7538}" dt="2026-04-08T01:19:11.897" v="63" actId="207"/>
+          <ac:spMkLst>
+            <pc:docMk/>
+            <pc:sldMk cId="1134590727" sldId="264"/>
+            <ac:spMk id="8" creationId="{0222E634-3E1E-AF68-9E45-DED43B0C9EB9}"/>
+          </ac:spMkLst>
+        </pc:spChg>
+        <pc:spChg chg="add mod ord">
+          <ac:chgData name="Muchammad Wildan Alkautsar" userId="360672ed2ee56274" providerId="LiveId" clId="{F5771622-C242-4EFB-9359-41E4DFBD7538}" dt="2026-04-08T01:26:42.291" v="161" actId="113"/>
+          <ac:spMkLst>
+            <pc:docMk/>
+            <pc:sldMk cId="1134590727" sldId="264"/>
+            <ac:spMk id="9" creationId="{96AC73F0-2340-5A43-60A6-3AE717A463B6}"/>
+          </ac:spMkLst>
+        </pc:spChg>
+      </pc:sldChg>
+      <pc:sldChg chg="new del">
+        <pc:chgData name="Muchammad Wildan Alkautsar" userId="360672ed2ee56274" providerId="LiveId" clId="{F5771622-C242-4EFB-9359-41E4DFBD7538}" dt="2026-04-08T01:14:15.409" v="17" actId="680"/>
+        <pc:sldMkLst>
+          <pc:docMk/>
+          <pc:sldMk cId="2820851979" sldId="264"/>
+        </pc:sldMkLst>
+      </pc:sldChg>
+    </pc:docChg>
+  </pc:docChgLst>
+</pc:chgInfo>
 </file>
 
 <file path=ppt/slideLayouts/slideLayout1.xml><?xml version="1.0" encoding="utf-8"?>
@@ -174,10 +407,9 @@
           <a:lstStyle/>
           <a:p>
             <a:r>
-              <a:rPr lang="en-US" smtClean="0"/>
+              <a:rPr lang="en-US"/>
               <a:t>Click to edit Master title style</a:t>
             </a:r>
-            <a:endParaRPr lang="en-US"/>
           </a:p>
         </p:txBody>
       </p:sp>
@@ -293,10 +525,9 @@
           </a:lstStyle>
           <a:p>
             <a:r>
-              <a:rPr lang="en-US" smtClean="0"/>
+              <a:rPr lang="en-US"/>
               <a:t>Click to edit Master subtitle style</a:t>
             </a:r>
-            <a:endParaRPr lang="en-US"/>
           </a:p>
         </p:txBody>
       </p:sp>
@@ -318,7 +549,7 @@
             <a:fld id="{1D8BD707-D9CF-40AE-B4C6-C98DA3205C09}" type="datetimeFigureOut">
               <a:rPr lang="en-US" smtClean="0"/>
               <a:pPr/>
-              <a:t>8/1/2011</a:t>
+              <a:t>4/8/2026</a:t>
             </a:fld>
             <a:endParaRPr lang="en-US"/>
           </a:p>
@@ -408,10 +639,9 @@
           <a:lstStyle/>
           <a:p>
             <a:r>
-              <a:rPr lang="en-US" smtClean="0"/>
+              <a:rPr lang="en-US"/>
               <a:t>Click to edit Master title style</a:t>
             </a:r>
-            <a:endParaRPr lang="en-US"/>
           </a:p>
         </p:txBody>
       </p:sp>
@@ -432,38 +662,37 @@
           <a:p>
             <a:pPr lvl="0"/>
             <a:r>
-              <a:rPr lang="en-US" smtClean="0"/>
+              <a:rPr lang="en-US"/>
               <a:t>Click to edit Master text styles</a:t>
             </a:r>
           </a:p>
           <a:p>
             <a:pPr lvl="1"/>
             <a:r>
-              <a:rPr lang="en-US" smtClean="0"/>
+              <a:rPr lang="en-US"/>
               <a:t>Second level</a:t>
             </a:r>
           </a:p>
           <a:p>
             <a:pPr lvl="2"/>
             <a:r>
-              <a:rPr lang="en-US" smtClean="0"/>
+              <a:rPr lang="en-US"/>
               <a:t>Third level</a:t>
             </a:r>
           </a:p>
           <a:p>
             <a:pPr lvl="3"/>
             <a:r>
-              <a:rPr lang="en-US" smtClean="0"/>
+              <a:rPr lang="en-US"/>
               <a:t>Fourth level</a:t>
             </a:r>
           </a:p>
           <a:p>
             <a:pPr lvl="4"/>
             <a:r>
-              <a:rPr lang="en-US" smtClean="0"/>
+              <a:rPr lang="en-US"/>
               <a:t>Fifth level</a:t>
             </a:r>
-            <a:endParaRPr lang="en-US"/>
           </a:p>
         </p:txBody>
       </p:sp>
@@ -485,7 +714,7 @@
             <a:fld id="{1D8BD707-D9CF-40AE-B4C6-C98DA3205C09}" type="datetimeFigureOut">
               <a:rPr lang="en-US" smtClean="0"/>
               <a:pPr/>
-              <a:t>8/1/2011</a:t>
+              <a:t>4/8/2026</a:t>
             </a:fld>
             <a:endParaRPr lang="en-US"/>
           </a:p>
@@ -580,10 +809,9 @@
           <a:lstStyle/>
           <a:p>
             <a:r>
-              <a:rPr lang="en-US" smtClean="0"/>
+              <a:rPr lang="en-US"/>
               <a:t>Click to edit Master title style</a:t>
             </a:r>
-            <a:endParaRPr lang="en-US"/>
           </a:p>
         </p:txBody>
       </p:sp>
@@ -609,38 +837,37 @@
           <a:p>
             <a:pPr lvl="0"/>
             <a:r>
-              <a:rPr lang="en-US" smtClean="0"/>
+              <a:rPr lang="en-US"/>
               <a:t>Click to edit Master text styles</a:t>
             </a:r>
           </a:p>
           <a:p>
             <a:pPr lvl="1"/>
             <a:r>
-              <a:rPr lang="en-US" smtClean="0"/>
+              <a:rPr lang="en-US"/>
               <a:t>Second level</a:t>
             </a:r>
           </a:p>
           <a:p>
             <a:pPr lvl="2"/>
             <a:r>
-              <a:rPr lang="en-US" smtClean="0"/>
+              <a:rPr lang="en-US"/>
               <a:t>Third level</a:t>
             </a:r>
           </a:p>
           <a:p>
             <a:pPr lvl="3"/>
             <a:r>
-              <a:rPr lang="en-US" smtClean="0"/>
+              <a:rPr lang="en-US"/>
               <a:t>Fourth level</a:t>
             </a:r>
           </a:p>
           <a:p>
             <a:pPr lvl="4"/>
             <a:r>
-              <a:rPr lang="en-US" smtClean="0"/>
+              <a:rPr lang="en-US"/>
               <a:t>Fifth level</a:t>
             </a:r>
-            <a:endParaRPr lang="en-US"/>
           </a:p>
         </p:txBody>
       </p:sp>
@@ -662,7 +889,7 @@
             <a:fld id="{1D8BD707-D9CF-40AE-B4C6-C98DA3205C09}" type="datetimeFigureOut">
               <a:rPr lang="en-US" smtClean="0"/>
               <a:pPr/>
-              <a:t>8/1/2011</a:t>
+              <a:t>4/8/2026</a:t>
             </a:fld>
             <a:endParaRPr lang="en-US"/>
           </a:p>
@@ -752,10 +979,9 @@
           <a:lstStyle/>
           <a:p>
             <a:r>
-              <a:rPr lang="en-US" smtClean="0"/>
+              <a:rPr lang="en-US"/>
               <a:t>Click to edit Master title style</a:t>
             </a:r>
-            <a:endParaRPr lang="en-US"/>
           </a:p>
         </p:txBody>
       </p:sp>
@@ -776,38 +1002,37 @@
           <a:p>
             <a:pPr lvl="0"/>
             <a:r>
-              <a:rPr lang="en-US" smtClean="0"/>
+              <a:rPr lang="en-US"/>
               <a:t>Click to edit Master text styles</a:t>
             </a:r>
           </a:p>
           <a:p>
             <a:pPr lvl="1"/>
             <a:r>
-              <a:rPr lang="en-US" smtClean="0"/>
+              <a:rPr lang="en-US"/>
               <a:t>Second level</a:t>
             </a:r>
           </a:p>
           <a:p>
             <a:pPr lvl="2"/>
             <a:r>
-              <a:rPr lang="en-US" smtClean="0"/>
+              <a:rPr lang="en-US"/>
               <a:t>Third level</a:t>
             </a:r>
           </a:p>
           <a:p>
             <a:pPr lvl="3"/>
             <a:r>
-              <a:rPr lang="en-US" smtClean="0"/>
+              <a:rPr lang="en-US"/>
               <a:t>Fourth level</a:t>
             </a:r>
           </a:p>
           <a:p>
             <a:pPr lvl="4"/>
             <a:r>
-              <a:rPr lang="en-US" smtClean="0"/>
+              <a:rPr lang="en-US"/>
               <a:t>Fifth level</a:t>
             </a:r>
-            <a:endParaRPr lang="en-US"/>
           </a:p>
         </p:txBody>
       </p:sp>
@@ -829,7 +1054,7 @@
             <a:fld id="{1D8BD707-D9CF-40AE-B4C6-C98DA3205C09}" type="datetimeFigureOut">
               <a:rPr lang="en-US" smtClean="0"/>
               <a:pPr/>
-              <a:t>8/1/2011</a:t>
+              <a:t>4/8/2026</a:t>
             </a:fld>
             <a:endParaRPr lang="en-US"/>
           </a:p>
@@ -928,10 +1153,9 @@
           </a:lstStyle>
           <a:p>
             <a:r>
-              <a:rPr lang="en-US" smtClean="0"/>
+              <a:rPr lang="en-US"/>
               <a:t>Click to edit Master title style</a:t>
             </a:r>
-            <a:endParaRPr lang="en-US"/>
           </a:p>
         </p:txBody>
       </p:sp>
@@ -1048,7 +1272,7 @@
           <a:p>
             <a:pPr lvl="0"/>
             <a:r>
-              <a:rPr lang="en-US" smtClean="0"/>
+              <a:rPr lang="en-US"/>
               <a:t>Click to edit Master text styles</a:t>
             </a:r>
           </a:p>
@@ -1072,7 +1296,7 @@
             <a:fld id="{1D8BD707-D9CF-40AE-B4C6-C98DA3205C09}" type="datetimeFigureOut">
               <a:rPr lang="en-US" smtClean="0"/>
               <a:pPr/>
-              <a:t>8/1/2011</a:t>
+              <a:t>4/8/2026</a:t>
             </a:fld>
             <a:endParaRPr lang="en-US"/>
           </a:p>
@@ -1162,10 +1386,9 @@
           <a:lstStyle/>
           <a:p>
             <a:r>
-              <a:rPr lang="en-US" smtClean="0"/>
+              <a:rPr lang="en-US"/>
               <a:t>Click to edit Master title style</a:t>
             </a:r>
-            <a:endParaRPr lang="en-US"/>
           </a:p>
         </p:txBody>
       </p:sp>
@@ -1219,38 +1442,37 @@
           <a:p>
             <a:pPr lvl="0"/>
             <a:r>
-              <a:rPr lang="en-US" smtClean="0"/>
+              <a:rPr lang="en-US"/>
               <a:t>Click to edit Master text styles</a:t>
             </a:r>
           </a:p>
           <a:p>
             <a:pPr lvl="1"/>
             <a:r>
-              <a:rPr lang="en-US" smtClean="0"/>
+              <a:rPr lang="en-US"/>
               <a:t>Second level</a:t>
             </a:r>
           </a:p>
           <a:p>
             <a:pPr lvl="2"/>
             <a:r>
-              <a:rPr lang="en-US" smtClean="0"/>
+              <a:rPr lang="en-US"/>
               <a:t>Third level</a:t>
             </a:r>
           </a:p>
           <a:p>
             <a:pPr lvl="3"/>
             <a:r>
-              <a:rPr lang="en-US" smtClean="0"/>
+              <a:rPr lang="en-US"/>
               <a:t>Fourth level</a:t>
             </a:r>
           </a:p>
           <a:p>
             <a:pPr lvl="4"/>
             <a:r>
-              <a:rPr lang="en-US" smtClean="0"/>
+              <a:rPr lang="en-US"/>
               <a:t>Fifth level</a:t>
             </a:r>
-            <a:endParaRPr lang="en-US"/>
           </a:p>
         </p:txBody>
       </p:sp>
@@ -1304,38 +1526,37 @@
           <a:p>
             <a:pPr lvl="0"/>
             <a:r>
-              <a:rPr lang="en-US" smtClean="0"/>
+              <a:rPr lang="en-US"/>
               <a:t>Click to edit Master text styles</a:t>
             </a:r>
           </a:p>
           <a:p>
             <a:pPr lvl="1"/>
             <a:r>
-              <a:rPr lang="en-US" smtClean="0"/>
+              <a:rPr lang="en-US"/>
               <a:t>Second level</a:t>
             </a:r>
           </a:p>
           <a:p>
             <a:pPr lvl="2"/>
             <a:r>
-              <a:rPr lang="en-US" smtClean="0"/>
+              <a:rPr lang="en-US"/>
               <a:t>Third level</a:t>
             </a:r>
           </a:p>
           <a:p>
             <a:pPr lvl="3"/>
             <a:r>
-              <a:rPr lang="en-US" smtClean="0"/>
+              <a:rPr lang="en-US"/>
               <a:t>Fourth level</a:t>
             </a:r>
           </a:p>
           <a:p>
             <a:pPr lvl="4"/>
             <a:r>
-              <a:rPr lang="en-US" smtClean="0"/>
+              <a:rPr lang="en-US"/>
               <a:t>Fifth level</a:t>
             </a:r>
-            <a:endParaRPr lang="en-US"/>
           </a:p>
         </p:txBody>
       </p:sp>
@@ -1357,7 +1578,7 @@
             <a:fld id="{1D8BD707-D9CF-40AE-B4C6-C98DA3205C09}" type="datetimeFigureOut">
               <a:rPr lang="en-US" smtClean="0"/>
               <a:pPr/>
-              <a:t>8/1/2011</a:t>
+              <a:t>4/8/2026</a:t>
             </a:fld>
             <a:endParaRPr lang="en-US"/>
           </a:p>
@@ -1451,10 +1672,9 @@
           </a:lstStyle>
           <a:p>
             <a:r>
-              <a:rPr lang="en-US" smtClean="0"/>
+              <a:rPr lang="en-US"/>
               <a:t>Click to edit Master title style</a:t>
             </a:r>
-            <a:endParaRPr lang="en-US"/>
           </a:p>
         </p:txBody>
       </p:sp>
@@ -1517,7 +1737,7 @@
           <a:p>
             <a:pPr lvl="0"/>
             <a:r>
-              <a:rPr lang="en-US" smtClean="0"/>
+              <a:rPr lang="en-US"/>
               <a:t>Click to edit Master text styles</a:t>
             </a:r>
           </a:p>
@@ -1573,38 +1793,37 @@
           <a:p>
             <a:pPr lvl="0"/>
             <a:r>
-              <a:rPr lang="en-US" smtClean="0"/>
+              <a:rPr lang="en-US"/>
               <a:t>Click to edit Master text styles</a:t>
             </a:r>
           </a:p>
           <a:p>
             <a:pPr lvl="1"/>
             <a:r>
-              <a:rPr lang="en-US" smtClean="0"/>
+              <a:rPr lang="en-US"/>
               <a:t>Second level</a:t>
             </a:r>
           </a:p>
           <a:p>
             <a:pPr lvl="2"/>
             <a:r>
-              <a:rPr lang="en-US" smtClean="0"/>
+              <a:rPr lang="en-US"/>
               <a:t>Third level</a:t>
             </a:r>
           </a:p>
           <a:p>
             <a:pPr lvl="3"/>
             <a:r>
-              <a:rPr lang="en-US" smtClean="0"/>
+              <a:rPr lang="en-US"/>
               <a:t>Fourth level</a:t>
             </a:r>
           </a:p>
           <a:p>
             <a:pPr lvl="4"/>
             <a:r>
-              <a:rPr lang="en-US" smtClean="0"/>
+              <a:rPr lang="en-US"/>
               <a:t>Fifth level</a:t>
             </a:r>
-            <a:endParaRPr lang="en-US"/>
           </a:p>
         </p:txBody>
       </p:sp>
@@ -1667,7 +1886,7 @@
           <a:p>
             <a:pPr lvl="0"/>
             <a:r>
-              <a:rPr lang="en-US" smtClean="0"/>
+              <a:rPr lang="en-US"/>
               <a:t>Click to edit Master text styles</a:t>
             </a:r>
           </a:p>
@@ -1723,38 +1942,37 @@
           <a:p>
             <a:pPr lvl="0"/>
             <a:r>
-              <a:rPr lang="en-US" smtClean="0"/>
+              <a:rPr lang="en-US"/>
               <a:t>Click to edit Master text styles</a:t>
             </a:r>
           </a:p>
           <a:p>
             <a:pPr lvl="1"/>
             <a:r>
-              <a:rPr lang="en-US" smtClean="0"/>
+              <a:rPr lang="en-US"/>
               <a:t>Second level</a:t>
             </a:r>
           </a:p>
           <a:p>
             <a:pPr lvl="2"/>
             <a:r>
-              <a:rPr lang="en-US" smtClean="0"/>
+              <a:rPr lang="en-US"/>
               <a:t>Third level</a:t>
             </a:r>
           </a:p>
           <a:p>
             <a:pPr lvl="3"/>
             <a:r>
-              <a:rPr lang="en-US" smtClean="0"/>
+              <a:rPr lang="en-US"/>
               <a:t>Fourth level</a:t>
             </a:r>
           </a:p>
           <a:p>
             <a:pPr lvl="4"/>
             <a:r>
-              <a:rPr lang="en-US" smtClean="0"/>
+              <a:rPr lang="en-US"/>
               <a:t>Fifth level</a:t>
             </a:r>
-            <a:endParaRPr lang="en-US"/>
           </a:p>
         </p:txBody>
       </p:sp>
@@ -1776,7 +1994,7 @@
             <a:fld id="{1D8BD707-D9CF-40AE-B4C6-C98DA3205C09}" type="datetimeFigureOut">
               <a:rPr lang="en-US" smtClean="0"/>
               <a:pPr/>
-              <a:t>8/1/2011</a:t>
+              <a:t>4/8/2026</a:t>
             </a:fld>
             <a:endParaRPr lang="en-US"/>
           </a:p>
@@ -1866,10 +2084,9 @@
           <a:lstStyle/>
           <a:p>
             <a:r>
-              <a:rPr lang="en-US" smtClean="0"/>
+              <a:rPr lang="en-US"/>
               <a:t>Click to edit Master title style</a:t>
             </a:r>
-            <a:endParaRPr lang="en-US"/>
           </a:p>
         </p:txBody>
       </p:sp>
@@ -1891,7 +2108,7 @@
             <a:fld id="{1D8BD707-D9CF-40AE-B4C6-C98DA3205C09}" type="datetimeFigureOut">
               <a:rPr lang="en-US" smtClean="0"/>
               <a:pPr/>
-              <a:t>8/1/2011</a:t>
+              <a:t>4/8/2026</a:t>
             </a:fld>
             <a:endParaRPr lang="en-US"/>
           </a:p>
@@ -1983,7 +2200,7 @@
             <a:fld id="{1D8BD707-D9CF-40AE-B4C6-C98DA3205C09}" type="datetimeFigureOut">
               <a:rPr lang="en-US" smtClean="0"/>
               <a:pPr/>
-              <a:t>8/1/2011</a:t>
+              <a:t>4/8/2026</a:t>
             </a:fld>
             <a:endParaRPr lang="en-US"/>
           </a:p>
@@ -2082,10 +2299,9 @@
           </a:lstStyle>
           <a:p>
             <a:r>
-              <a:rPr lang="en-US" smtClean="0"/>
+              <a:rPr lang="en-US"/>
               <a:t>Click to edit Master title style</a:t>
             </a:r>
-            <a:endParaRPr lang="en-US"/>
           </a:p>
         </p:txBody>
       </p:sp>
@@ -2139,38 +2355,37 @@
           <a:p>
             <a:pPr lvl="0"/>
             <a:r>
-              <a:rPr lang="en-US" smtClean="0"/>
+              <a:rPr lang="en-US"/>
               <a:t>Click to edit Master text styles</a:t>
             </a:r>
           </a:p>
           <a:p>
             <a:pPr lvl="1"/>
             <a:r>
-              <a:rPr lang="en-US" smtClean="0"/>
+              <a:rPr lang="en-US"/>
               <a:t>Second level</a:t>
             </a:r>
           </a:p>
           <a:p>
             <a:pPr lvl="2"/>
             <a:r>
-              <a:rPr lang="en-US" smtClean="0"/>
+              <a:rPr lang="en-US"/>
               <a:t>Third level</a:t>
             </a:r>
           </a:p>
           <a:p>
             <a:pPr lvl="3"/>
             <a:r>
-              <a:rPr lang="en-US" smtClean="0"/>
+              <a:rPr lang="en-US"/>
               <a:t>Fourth level</a:t>
             </a:r>
           </a:p>
           <a:p>
             <a:pPr lvl="4"/>
             <a:r>
-              <a:rPr lang="en-US" smtClean="0"/>
+              <a:rPr lang="en-US"/>
               <a:t>Fifth level</a:t>
             </a:r>
-            <a:endParaRPr lang="en-US"/>
           </a:p>
         </p:txBody>
       </p:sp>
@@ -2233,7 +2448,7 @@
           <a:p>
             <a:pPr lvl="0"/>
             <a:r>
-              <a:rPr lang="en-US" smtClean="0"/>
+              <a:rPr lang="en-US"/>
               <a:t>Click to edit Master text styles</a:t>
             </a:r>
           </a:p>
@@ -2257,7 +2472,7 @@
             <a:fld id="{1D8BD707-D9CF-40AE-B4C6-C98DA3205C09}" type="datetimeFigureOut">
               <a:rPr lang="en-US" smtClean="0"/>
               <a:pPr/>
-              <a:t>8/1/2011</a:t>
+              <a:t>4/8/2026</a:t>
             </a:fld>
             <a:endParaRPr lang="en-US"/>
           </a:p>
@@ -2356,10 +2571,9 @@
           </a:lstStyle>
           <a:p>
             <a:r>
-              <a:rPr lang="en-US" smtClean="0"/>
+              <a:rPr lang="en-US"/>
               <a:t>Click to edit Master title style</a:t>
             </a:r>
-            <a:endParaRPr lang="en-US"/>
           </a:p>
         </p:txBody>
       </p:sp>
@@ -2483,7 +2697,7 @@
           <a:p>
             <a:pPr lvl="0"/>
             <a:r>
-              <a:rPr lang="en-US" smtClean="0"/>
+              <a:rPr lang="en-US"/>
               <a:t>Click to edit Master text styles</a:t>
             </a:r>
           </a:p>
@@ -2507,7 +2721,7 @@
             <a:fld id="{1D8BD707-D9CF-40AE-B4C6-C98DA3205C09}" type="datetimeFigureOut">
               <a:rPr lang="en-US" smtClean="0"/>
               <a:pPr/>
-              <a:t>8/1/2011</a:t>
+              <a:t>4/8/2026</a:t>
             </a:fld>
             <a:endParaRPr lang="en-US"/>
           </a:p>
@@ -2612,10 +2826,9 @@
           <a:lstStyle/>
           <a:p>
             <a:r>
-              <a:rPr lang="en-US" smtClean="0"/>
+              <a:rPr lang="en-US"/>
               <a:t>Click to edit Master title style</a:t>
             </a:r>
-            <a:endParaRPr lang="en-US"/>
           </a:p>
         </p:txBody>
       </p:sp>
@@ -2646,38 +2859,37 @@
           <a:p>
             <a:pPr lvl="0"/>
             <a:r>
-              <a:rPr lang="en-US" smtClean="0"/>
+              <a:rPr lang="en-US"/>
               <a:t>Click to edit Master text styles</a:t>
             </a:r>
           </a:p>
           <a:p>
             <a:pPr lvl="1"/>
             <a:r>
-              <a:rPr lang="en-US" smtClean="0"/>
+              <a:rPr lang="en-US"/>
               <a:t>Second level</a:t>
             </a:r>
           </a:p>
           <a:p>
             <a:pPr lvl="2"/>
             <a:r>
-              <a:rPr lang="en-US" smtClean="0"/>
+              <a:rPr lang="en-US"/>
               <a:t>Third level</a:t>
             </a:r>
           </a:p>
           <a:p>
             <a:pPr lvl="3"/>
             <a:r>
-              <a:rPr lang="en-US" smtClean="0"/>
+              <a:rPr lang="en-US"/>
               <a:t>Fourth level</a:t>
             </a:r>
           </a:p>
           <a:p>
             <a:pPr lvl="4"/>
             <a:r>
-              <a:rPr lang="en-US" smtClean="0"/>
+              <a:rPr lang="en-US"/>
               <a:t>Fifth level</a:t>
             </a:r>
-            <a:endParaRPr lang="en-US"/>
           </a:p>
         </p:txBody>
       </p:sp>
@@ -2717,7 +2929,7 @@
             <a:fld id="{1D8BD707-D9CF-40AE-B4C6-C98DA3205C09}" type="datetimeFigureOut">
               <a:rPr lang="en-US" smtClean="0"/>
               <a:pPr/>
-              <a:t>8/1/2011</a:t>
+              <a:t>4/8/2026</a:t>
             </a:fld>
             <a:endParaRPr lang="en-US"/>
           </a:p>
@@ -3072,13 +3284,14 @@
 </file>
 
 <file path=ppt/slides/slide1.xml><?xml version="1.0" encoding="utf-8"?>
-<p:sld xmlns:p="http://schemas.openxmlformats.org/presentationml/2006/main" xmlns:a="http://schemas.openxmlformats.org/drawingml/2006/main" xmlns:r="http://schemas.openxmlformats.org/officeDocument/2006/relationships">
+<p:sld xmlns:a="http://schemas.openxmlformats.org/drawingml/2006/main" xmlns:r="http://schemas.openxmlformats.org/officeDocument/2006/relationships" xmlns:p="http://schemas.openxmlformats.org/presentationml/2006/main">
   <p:cSld>
     <p:bg>
       <p:bgPr>
         <a:solidFill>
           <a:srgbClr val="172944"/>
         </a:solidFill>
+        <a:effectLst/>
       </p:bgPr>
     </p:bg>
     <p:spTree>
@@ -3097,12 +3310,12 @@
       </p:grpSpPr>
       <p:grpSp>
         <p:nvGrpSpPr>
-          <p:cNvPr name="Group 2" id="2"/>
+          <p:cNvPr id="2" name="Group 2"/>
           <p:cNvGrpSpPr/>
           <p:nvPr/>
         </p:nvGrpSpPr>
         <p:grpSpPr>
-          <a:xfrm rot="0">
+          <a:xfrm>
             <a:off x="530539" y="513682"/>
             <a:ext cx="16405949" cy="9259635"/>
             <a:chOff x="0" y="0"/>
@@ -3111,12 +3324,12 @@
         </p:grpSpPr>
         <p:sp>
           <p:nvSpPr>
-            <p:cNvPr name="Freeform 3" id="3"/>
+            <p:cNvPr id="3" name="Freeform 3"/>
             <p:cNvSpPr/>
             <p:nvPr/>
           </p:nvSpPr>
           <p:spPr>
-            <a:xfrm flipH="false" flipV="false" rot="0">
+            <a:xfrm>
               <a:off x="0" y="0"/>
               <a:ext cx="2541711" cy="1434560"/>
             </a:xfrm>
@@ -3125,9 +3338,9 @@
               <a:gdLst/>
               <a:ahLst/>
               <a:cxnLst/>
-              <a:rect r="r" b="b" t="t" l="l"/>
+              <a:rect l="l" t="t" r="r" b="b"/>
               <a:pathLst>
-                <a:path h="1434560" w="2541711">
+                <a:path w="2541711" h="1434560">
                   <a:moveTo>
                     <a:pt x="0" y="0"/>
                   </a:moveTo>
@@ -3149,7 +3362,7 @@
                 <a:alphaModFix amt="70000"/>
               </a:blip>
               <a:stretch>
-                <a:fillRect l="0" t="-82882" r="0" b="-82882"/>
+                <a:fillRect t="-82882" b="-82882"/>
               </a:stretch>
             </a:blipFill>
           </p:spPr>
@@ -3157,60 +3370,60 @@
       </p:grpSp>
       <p:sp>
         <p:nvSpPr>
-          <p:cNvPr name="AutoShape 4" id="4"/>
+          <p:cNvPr id="4" name="AutoShape 4"/>
           <p:cNvSpPr/>
           <p:nvPr/>
         </p:nvSpPr>
         <p:spPr>
-          <a:xfrm flipV="true">
+          <a:xfrm flipV="1">
             <a:off x="17580241" y="513682"/>
             <a:ext cx="0" cy="354402"/>
           </a:xfrm>
           <a:prstGeom prst="line">
             <a:avLst/>
           </a:prstGeom>
-          <a:ln cap="flat" w="19050">
+          <a:ln w="19050" cap="flat">
             <a:solidFill>
               <a:srgbClr val="CFD3D5"/>
             </a:solidFill>
             <a:prstDash val="solid"/>
-            <a:headEnd type="none" len="sm" w="sm"/>
-            <a:tailEnd type="none" len="sm" w="sm"/>
+            <a:headEnd type="none" w="sm" len="sm"/>
+            <a:tailEnd type="none" w="sm" len="sm"/>
           </a:ln>
         </p:spPr>
       </p:sp>
       <p:sp>
         <p:nvSpPr>
-          <p:cNvPr name="AutoShape 5" id="5"/>
+          <p:cNvPr id="5" name="AutoShape 5"/>
           <p:cNvSpPr/>
           <p:nvPr/>
         </p:nvSpPr>
         <p:spPr>
-          <a:xfrm flipV="true">
+          <a:xfrm flipV="1">
             <a:off x="17692515" y="513682"/>
             <a:ext cx="0" cy="354402"/>
           </a:xfrm>
           <a:prstGeom prst="line">
             <a:avLst/>
           </a:prstGeom>
-          <a:ln cap="flat" w="19050">
+          <a:ln w="19050" cap="flat">
             <a:solidFill>
               <a:srgbClr val="CFD3D5"/>
             </a:solidFill>
             <a:prstDash val="solid"/>
-            <a:headEnd type="none" len="sm" w="sm"/>
-            <a:tailEnd type="none" len="sm" w="sm"/>
+            <a:headEnd type="none" w="sm" len="sm"/>
+            <a:tailEnd type="none" w="sm" len="sm"/>
           </a:ln>
         </p:spPr>
       </p:sp>
       <p:grpSp>
         <p:nvGrpSpPr>
-          <p:cNvPr name="Group 6" id="6"/>
+          <p:cNvPr id="6" name="Group 6"/>
           <p:cNvGrpSpPr/>
           <p:nvPr/>
         </p:nvGrpSpPr>
         <p:grpSpPr>
-          <a:xfrm rot="0">
+          <a:xfrm>
             <a:off x="2861880" y="3294220"/>
             <a:ext cx="11743267" cy="3698560"/>
             <a:chOff x="0" y="0"/>
@@ -3219,12 +3432,12 @@
         </p:grpSpPr>
         <p:sp>
           <p:nvSpPr>
-            <p:cNvPr name="Freeform 7" id="7"/>
+            <p:cNvPr id="7" name="Freeform 7"/>
             <p:cNvSpPr/>
             <p:nvPr/>
           </p:nvSpPr>
           <p:spPr>
-            <a:xfrm flipH="false" flipV="false" rot="0">
+            <a:xfrm>
               <a:off x="0" y="0"/>
               <a:ext cx="3092877" cy="974106"/>
             </a:xfrm>
@@ -3233,9 +3446,9 @@
               <a:gdLst/>
               <a:ahLst/>
               <a:cxnLst/>
-              <a:rect r="r" b="b" t="t" l="l"/>
+              <a:rect l="l" t="t" r="r" b="b"/>
               <a:pathLst>
-                <a:path h="974106" w="3092877">
+                <a:path w="3092877" h="974106">
                   <a:moveTo>
                     <a:pt x="0" y="0"/>
                   </a:moveTo>
@@ -3265,8 +3478,8 @@
         </p:sp>
         <p:sp>
           <p:nvSpPr>
-            <p:cNvPr name="TextBox 8" id="8"/>
-            <p:cNvSpPr txBox="true"/>
+            <p:cNvPr id="8" name="TextBox 8"/>
+            <p:cNvSpPr txBox="1"/>
             <p:nvPr/>
           </p:nvSpPr>
           <p:spPr>
@@ -3279,7 +3492,7 @@
             </a:prstGeom>
           </p:spPr>
           <p:txBody>
-            <a:bodyPr anchor="ctr" rtlCol="false" tIns="50800" lIns="50800" bIns="50800" rIns="50800"/>
+            <a:bodyPr lIns="50800" tIns="50800" rIns="50800" bIns="50800" rtlCol="0" anchor="ctr"/>
             <a:lstStyle/>
             <a:p>
               <a:pPr algn="ctr">
@@ -3287,18 +3500,19 @@
                   <a:spcPts val="2089"/>
                 </a:lnSpc>
               </a:pPr>
+              <a:endParaRPr/>
             </a:p>
           </p:txBody>
         </p:sp>
       </p:grpSp>
       <p:sp>
         <p:nvSpPr>
-          <p:cNvPr name="TextBox 9" id="9"/>
-          <p:cNvSpPr txBox="true"/>
+          <p:cNvPr id="9" name="TextBox 9"/>
+          <p:cNvSpPr txBox="1"/>
           <p:nvPr/>
         </p:nvSpPr>
         <p:spPr>
-          <a:xfrm rot="0">
+          <a:xfrm>
             <a:off x="2376806" y="4241772"/>
             <a:ext cx="12528427" cy="3510653"/>
           </a:xfrm>
@@ -3307,22 +3521,22 @@
           </a:prstGeom>
         </p:spPr>
         <p:txBody>
-          <a:bodyPr anchor="t" rtlCol="false" tIns="0" lIns="0" bIns="0" rIns="0">
+          <a:bodyPr lIns="0" tIns="0" rIns="0" bIns="0" rtlCol="0" anchor="t">
             <a:spAutoFit/>
           </a:bodyPr>
           <a:lstStyle/>
           <a:p>
-            <a:pPr algn="ctr" marL="0" indent="0" lvl="0">
+            <a:pPr marL="0" lvl="0" indent="0" algn="ctr">
               <a:lnSpc>
                 <a:spcPts val="13672"/>
               </a:lnSpc>
             </a:pPr>
             <a:r>
-              <a:rPr lang="en-US" sz="12429" spc="3579">
+              <a:rPr lang="en-US" sz="12429" spc="3579" dirty="0">
                 <a:solidFill>
                   <a:srgbClr val="E1E1E1"/>
                 </a:solidFill>
-                <a:latin typeface="Josefin Sans"/>
+                <a:latin typeface="+mj-lt"/>
                 <a:ea typeface="Josefin Sans"/>
                 <a:cs typeface="Josefin Sans"/>
                 <a:sym typeface="Josefin Sans"/>
@@ -3334,8 +3548,8 @@
       </p:sp>
       <p:sp>
         <p:nvSpPr>
-          <p:cNvPr name="TextBox 10" id="10"/>
-          <p:cNvSpPr txBox="true"/>
+          <p:cNvPr id="10" name="TextBox 10"/>
+          <p:cNvSpPr txBox="1"/>
           <p:nvPr/>
         </p:nvSpPr>
         <p:spPr>
@@ -3348,22 +3562,22 @@
           </a:prstGeom>
         </p:spPr>
         <p:txBody>
-          <a:bodyPr anchor="t" rtlCol="false" tIns="0" lIns="0" bIns="0" rIns="0">
+          <a:bodyPr lIns="0" tIns="0" rIns="0" bIns="0" rtlCol="0" anchor="t">
             <a:spAutoFit/>
           </a:bodyPr>
           <a:lstStyle/>
           <a:p>
-            <a:pPr algn="ctr" marL="0" indent="0" lvl="0">
+            <a:pPr marL="0" lvl="0" indent="0" algn="ctr">
               <a:lnSpc>
                 <a:spcPts val="2089"/>
               </a:lnSpc>
             </a:pPr>
             <a:r>
-              <a:rPr lang="en-US" sz="1899" spc="613">
+              <a:rPr lang="en-US" sz="1899" spc="613" dirty="0">
                 <a:solidFill>
                   <a:srgbClr val="E1E1E1"/>
                 </a:solidFill>
-                <a:latin typeface="Josefin Sans Light"/>
+                <a:latin typeface="+mj-lt"/>
                 <a:ea typeface="Josefin Sans Light"/>
                 <a:cs typeface="Josefin Sans Light"/>
                 <a:sym typeface="Josefin Sans Light"/>
@@ -3375,8 +3589,8 @@
       </p:sp>
       <p:sp>
         <p:nvSpPr>
-          <p:cNvPr name="TextBox 11" id="11"/>
-          <p:cNvSpPr txBox="true"/>
+          <p:cNvPr id="11" name="TextBox 11"/>
+          <p:cNvSpPr txBox="1"/>
           <p:nvPr/>
         </p:nvSpPr>
         <p:spPr>
@@ -3389,22 +3603,22 @@
           </a:prstGeom>
         </p:spPr>
         <p:txBody>
-          <a:bodyPr anchor="t" rtlCol="false" tIns="0" lIns="0" bIns="0" rIns="0">
+          <a:bodyPr lIns="0" tIns="0" rIns="0" bIns="0" rtlCol="0" anchor="t">
             <a:spAutoFit/>
           </a:bodyPr>
           <a:lstStyle/>
           <a:p>
-            <a:pPr algn="l" marL="0" indent="0" lvl="0">
+            <a:pPr marL="0" lvl="0" indent="0" algn="l">
               <a:lnSpc>
                 <a:spcPts val="2089"/>
               </a:lnSpc>
             </a:pPr>
             <a:r>
-              <a:rPr lang="en-US" sz="1899" spc="613">
+              <a:rPr lang="en-US" sz="1899" spc="613" dirty="0">
                 <a:solidFill>
                   <a:srgbClr val="E1E1E1"/>
                 </a:solidFill>
-                <a:latin typeface="Josefin Sans Light"/>
+                <a:latin typeface="+mj-lt"/>
                 <a:ea typeface="Josefin Sans Light"/>
                 <a:cs typeface="Josefin Sans Light"/>
                 <a:sym typeface="Josefin Sans Light"/>
@@ -3423,13 +3637,14 @@
 </file>
 
 <file path=ppt/slides/slide2.xml><?xml version="1.0" encoding="utf-8"?>
-<p:sld xmlns:p="http://schemas.openxmlformats.org/presentationml/2006/main" xmlns:a="http://schemas.openxmlformats.org/drawingml/2006/main" xmlns:r="http://schemas.openxmlformats.org/officeDocument/2006/relationships">
+<p:sld xmlns:a="http://schemas.openxmlformats.org/drawingml/2006/main" xmlns:r="http://schemas.openxmlformats.org/officeDocument/2006/relationships" xmlns:p="http://schemas.openxmlformats.org/presentationml/2006/main">
   <p:cSld>
     <p:bg>
       <p:bgPr>
         <a:solidFill>
           <a:srgbClr val="172944"/>
         </a:solidFill>
+        <a:effectLst/>
       </p:bgPr>
     </p:bg>
     <p:spTree>
@@ -3448,60 +3663,60 @@
       </p:grpSpPr>
       <p:sp>
         <p:nvSpPr>
-          <p:cNvPr name="AutoShape 2" id="2"/>
+          <p:cNvPr id="2" name="AutoShape 2"/>
           <p:cNvSpPr/>
           <p:nvPr/>
         </p:nvSpPr>
         <p:spPr>
-          <a:xfrm flipV="true">
+          <a:xfrm flipV="1">
             <a:off x="17580241" y="513682"/>
             <a:ext cx="0" cy="354402"/>
           </a:xfrm>
           <a:prstGeom prst="line">
             <a:avLst/>
           </a:prstGeom>
-          <a:ln cap="flat" w="19050">
+          <a:ln w="19050" cap="flat">
             <a:solidFill>
               <a:srgbClr val="FFFFFF"/>
             </a:solidFill>
             <a:prstDash val="solid"/>
-            <a:headEnd type="none" len="sm" w="sm"/>
-            <a:tailEnd type="none" len="sm" w="sm"/>
+            <a:headEnd type="none" w="sm" len="sm"/>
+            <a:tailEnd type="none" w="sm" len="sm"/>
           </a:ln>
         </p:spPr>
       </p:sp>
       <p:sp>
         <p:nvSpPr>
-          <p:cNvPr name="AutoShape 3" id="3"/>
+          <p:cNvPr id="3" name="AutoShape 3"/>
           <p:cNvSpPr/>
           <p:nvPr/>
         </p:nvSpPr>
         <p:spPr>
-          <a:xfrm flipV="true">
+          <a:xfrm flipV="1">
             <a:off x="17692515" y="513682"/>
             <a:ext cx="0" cy="354402"/>
           </a:xfrm>
           <a:prstGeom prst="line">
             <a:avLst/>
           </a:prstGeom>
-          <a:ln cap="flat" w="19050">
+          <a:ln w="19050" cap="flat">
             <a:solidFill>
               <a:srgbClr val="FFFFFF"/>
             </a:solidFill>
             <a:prstDash val="solid"/>
-            <a:headEnd type="none" len="sm" w="sm"/>
-            <a:tailEnd type="none" len="sm" w="sm"/>
+            <a:headEnd type="none" w="sm" len="sm"/>
+            <a:tailEnd type="none" w="sm" len="sm"/>
           </a:ln>
         </p:spPr>
       </p:sp>
       <p:sp>
         <p:nvSpPr>
-          <p:cNvPr name="Freeform 4" id="4"/>
+          <p:cNvPr id="4" name="Freeform 4"/>
           <p:cNvSpPr/>
           <p:nvPr/>
         </p:nvSpPr>
         <p:spPr>
-          <a:xfrm flipH="false" flipV="false" rot="0">
+          <a:xfrm>
             <a:off x="6512178" y="2963659"/>
             <a:ext cx="10747122" cy="4359681"/>
           </a:xfrm>
@@ -3510,9 +3725,9 @@
             <a:gdLst/>
             <a:ahLst/>
             <a:cxnLst/>
-            <a:rect r="r" b="b" t="t" l="l"/>
+            <a:rect l="l" t="t" r="r" b="b"/>
             <a:pathLst>
-              <a:path h="4359681" w="10747122">
+              <a:path w="10747122" h="4359681">
                 <a:moveTo>
                   <a:pt x="0" y="0"/>
                 </a:moveTo>
@@ -3535,15 +3750,15 @@
           <a:blipFill>
             <a:blip r:embed="rId2"/>
             <a:stretch>
-              <a:fillRect l="0" t="0" r="0" b="0"/>
+              <a:fillRect/>
             </a:stretch>
           </a:blipFill>
         </p:spPr>
       </p:sp>
       <p:sp>
         <p:nvSpPr>
-          <p:cNvPr name="TextBox 5" id="5"/>
-          <p:cNvSpPr txBox="true"/>
+          <p:cNvPr id="5" name="TextBox 5"/>
+          <p:cNvSpPr txBox="1"/>
           <p:nvPr/>
         </p:nvSpPr>
         <p:spPr>
@@ -3556,12 +3771,12 @@
           </a:prstGeom>
         </p:spPr>
         <p:txBody>
-          <a:bodyPr anchor="t" rtlCol="false" tIns="0" lIns="0" bIns="0" rIns="0">
+          <a:bodyPr lIns="0" tIns="0" rIns="0" bIns="0" rtlCol="0" anchor="t">
             <a:spAutoFit/>
           </a:bodyPr>
           <a:lstStyle/>
           <a:p>
-            <a:pPr algn="ctr" marL="0" indent="0" lvl="0">
+            <a:pPr marL="0" lvl="0" indent="0" algn="ctr">
               <a:lnSpc>
                 <a:spcPts val="2089"/>
               </a:lnSpc>
@@ -3583,8 +3798,8 @@
       </p:sp>
       <p:sp>
         <p:nvSpPr>
-          <p:cNvPr name="TextBox 6" id="6"/>
-          <p:cNvSpPr txBox="true"/>
+          <p:cNvPr id="6" name="TextBox 6"/>
+          <p:cNvSpPr txBox="1"/>
           <p:nvPr/>
         </p:nvSpPr>
         <p:spPr>
@@ -3597,12 +3812,12 @@
           </a:prstGeom>
         </p:spPr>
         <p:txBody>
-          <a:bodyPr anchor="t" rtlCol="false" tIns="0" lIns="0" bIns="0" rIns="0">
+          <a:bodyPr lIns="0" tIns="0" rIns="0" bIns="0" rtlCol="0" anchor="t">
             <a:spAutoFit/>
           </a:bodyPr>
           <a:lstStyle/>
           <a:p>
-            <a:pPr algn="l" marL="0" indent="0" lvl="0">
+            <a:pPr marL="0" lvl="0" indent="0" algn="l">
               <a:lnSpc>
                 <a:spcPts val="2089"/>
               </a:lnSpc>
@@ -3624,12 +3839,12 @@
       </p:sp>
       <p:sp>
         <p:nvSpPr>
-          <p:cNvPr name="TextBox 7" id="7"/>
-          <p:cNvSpPr txBox="true"/>
+          <p:cNvPr id="7" name="TextBox 7"/>
+          <p:cNvSpPr txBox="1"/>
           <p:nvPr/>
         </p:nvSpPr>
         <p:spPr>
-          <a:xfrm rot="0">
+          <a:xfrm>
             <a:off x="1028700" y="2766139"/>
             <a:ext cx="6492149" cy="450215"/>
           </a:xfrm>
@@ -3638,22 +3853,22 @@
           </a:prstGeom>
         </p:spPr>
         <p:txBody>
-          <a:bodyPr anchor="t" rtlCol="false" tIns="0" lIns="0" bIns="0" rIns="0">
+          <a:bodyPr lIns="0" tIns="0" rIns="0" bIns="0" rtlCol="0" anchor="t">
             <a:spAutoFit/>
           </a:bodyPr>
           <a:lstStyle/>
           <a:p>
-            <a:pPr algn="l" marL="0" indent="0" lvl="0">
+            <a:pPr marL="0" lvl="0" indent="0" algn="l">
               <a:lnSpc>
                 <a:spcPts val="3520"/>
               </a:lnSpc>
             </a:pPr>
             <a:r>
-              <a:rPr lang="en-US" sz="3200">
+              <a:rPr lang="en-US" sz="3200" dirty="0">
                 <a:solidFill>
                   <a:srgbClr val="E1E1E1"/>
                 </a:solidFill>
-                <a:latin typeface="Josefin Sans"/>
+                <a:latin typeface="+mj-lt"/>
                 <a:ea typeface="Josefin Sans"/>
                 <a:cs typeface="Josefin Sans"/>
                 <a:sym typeface="Josefin Sans"/>
@@ -3665,21 +3880,21 @@
       </p:sp>
       <p:sp>
         <p:nvSpPr>
-          <p:cNvPr name="TextBox 8" id="8"/>
-          <p:cNvSpPr txBox="true"/>
+          <p:cNvPr id="8" name="TextBox 8"/>
+          <p:cNvSpPr txBox="1"/>
           <p:nvPr/>
         </p:nvSpPr>
         <p:spPr>
-          <a:xfrm rot="0">
+          <a:xfrm>
             <a:off x="1028700" y="4138933"/>
-            <a:ext cx="5245353" cy="1323238"/>
+            <a:ext cx="5245353" cy="1362937"/>
           </a:xfrm>
           <a:prstGeom prst="rect">
             <a:avLst/>
           </a:prstGeom>
         </p:spPr>
         <p:txBody>
-          <a:bodyPr anchor="t" rtlCol="false" tIns="0" lIns="0" bIns="0" rIns="0">
+          <a:bodyPr lIns="0" tIns="0" rIns="0" bIns="0" rtlCol="0" anchor="t">
             <a:spAutoFit/>
           </a:bodyPr>
           <a:lstStyle/>
@@ -3693,35 +3908,21 @@
               </a:spcBef>
             </a:pPr>
             <a:r>
-              <a:rPr lang="en-US" sz="1904">
+              <a:rPr lang="en-US" sz="1904" dirty="0">
                 <a:solidFill>
                   <a:srgbClr val="FFFFFF"/>
                 </a:solidFill>
-                <a:latin typeface="Open Sans Light"/>
                 <a:ea typeface="Open Sans Light"/>
                 <a:cs typeface="Open Sans Light"/>
                 <a:sym typeface="Open Sans Light"/>
               </a:rPr>
-              <a:t>N</a:t>
-            </a:r>
-            <a:r>
-              <a:rPr lang="en-US" sz="1904">
+              <a:t>Net profit exhibits a fluctuating but generally stable trend, peaking significantly in </a:t>
+            </a:r>
+            <a:r>
+              <a:rPr lang="en-US" sz="1904" b="1" dirty="0">
                 <a:solidFill>
                   <a:srgbClr val="FFFFFF"/>
                 </a:solidFill>
-                <a:latin typeface="Open Sans Light"/>
-                <a:ea typeface="Open Sans Light"/>
-                <a:cs typeface="Open Sans Light"/>
-                <a:sym typeface="Open Sans Light"/>
-              </a:rPr>
-              <a:t>et profit exhibits a fluctuating but generally stable trend, peaking significantly in </a:t>
-            </a:r>
-            <a:r>
-              <a:rPr lang="en-US" b="true" sz="1904">
-                <a:solidFill>
-                  <a:srgbClr val="FFFFFF"/>
-                </a:solidFill>
-                <a:latin typeface="Open Sans Bold"/>
                 <a:ea typeface="Open Sans Bold"/>
                 <a:cs typeface="Open Sans Bold"/>
                 <a:sym typeface="Open Sans Bold"/>
@@ -3729,11 +3930,10 @@
               <a:t>March ($4.5M)</a:t>
             </a:r>
             <a:r>
-              <a:rPr lang="en-US" sz="1904">
+              <a:rPr lang="en-US" sz="1904" dirty="0">
                 <a:solidFill>
                   <a:srgbClr val="FFFFFF"/>
                 </a:solidFill>
-                <a:latin typeface="Open Sans Light"/>
                 <a:ea typeface="Open Sans Light"/>
                 <a:cs typeface="Open Sans Light"/>
                 <a:sym typeface="Open Sans Light"/>
@@ -3741,11 +3941,10 @@
               <a:t> while maintaining a consistent baseline above </a:t>
             </a:r>
             <a:r>
-              <a:rPr lang="en-US" b="true" sz="1904">
+              <a:rPr lang="en-US" sz="1904" b="1" dirty="0">
                 <a:solidFill>
                   <a:srgbClr val="FFFFFF"/>
                 </a:solidFill>
-                <a:latin typeface="Open Sans Bold"/>
                 <a:ea typeface="Open Sans Bold"/>
                 <a:cs typeface="Open Sans Bold"/>
                 <a:sym typeface="Open Sans Bold"/>
@@ -3753,11 +3952,10 @@
               <a:t>$3.7M</a:t>
             </a:r>
             <a:r>
-              <a:rPr lang="en-US" sz="1904">
+              <a:rPr lang="en-US" sz="1904" dirty="0">
                 <a:solidFill>
                   <a:srgbClr val="FFFFFF"/>
                 </a:solidFill>
-                <a:latin typeface="Open Sans Light"/>
                 <a:ea typeface="Open Sans Light"/>
                 <a:cs typeface="Open Sans Light"/>
                 <a:sym typeface="Open Sans Light"/>
@@ -3769,12 +3967,12 @@
       </p:sp>
       <p:grpSp>
         <p:nvGrpSpPr>
-          <p:cNvPr name="Group 9" id="9"/>
+          <p:cNvPr id="9" name="Group 9"/>
           <p:cNvGrpSpPr/>
           <p:nvPr/>
         </p:nvGrpSpPr>
         <p:grpSpPr>
-          <a:xfrm rot="0">
+          <a:xfrm>
             <a:off x="8981122" y="3712845"/>
             <a:ext cx="1385888" cy="1092518"/>
             <a:chOff x="0" y="0"/>
@@ -3783,12 +3981,12 @@
         </p:grpSpPr>
         <p:sp>
           <p:nvSpPr>
-            <p:cNvPr name="Freeform 10" id="10"/>
+            <p:cNvPr id="10" name="Freeform 10"/>
             <p:cNvSpPr/>
             <p:nvPr/>
           </p:nvSpPr>
           <p:spPr>
-            <a:xfrm flipH="false" flipV="false" rot="0">
+            <a:xfrm>
               <a:off x="50800" y="45346"/>
               <a:ext cx="1751612" cy="1366917"/>
             </a:xfrm>
@@ -3797,9 +3995,9 @@
               <a:gdLst/>
               <a:ahLst/>
               <a:cxnLst/>
-              <a:rect r="r" b="b" t="t" l="l"/>
+              <a:rect l="l" t="t" r="r" b="b"/>
               <a:pathLst>
-                <a:path h="1366917" w="1751612">
+                <a:path w="1751612" h="1366917">
                   <a:moveTo>
                     <a:pt x="741680" y="344544"/>
                   </a:moveTo>
@@ -4039,12 +4237,12 @@
       </p:grpSp>
       <p:grpSp>
         <p:nvGrpSpPr>
-          <p:cNvPr name="Group 11" id="11"/>
+          <p:cNvPr id="11" name="Group 11"/>
           <p:cNvGrpSpPr/>
           <p:nvPr/>
         </p:nvGrpSpPr>
         <p:grpSpPr>
-          <a:xfrm rot="0">
+          <a:xfrm>
             <a:off x="8260080" y="5021580"/>
             <a:ext cx="1244918" cy="1124902"/>
             <a:chOff x="0" y="0"/>
@@ -4053,12 +4251,12 @@
         </p:grpSpPr>
         <p:sp>
           <p:nvSpPr>
-            <p:cNvPr name="Freeform 12" id="12"/>
+            <p:cNvPr id="12" name="Freeform 12"/>
             <p:cNvSpPr/>
             <p:nvPr/>
           </p:nvSpPr>
           <p:spPr>
-            <a:xfrm flipH="false" flipV="false" rot="0">
+            <a:xfrm>
               <a:off x="50720" y="49252"/>
               <a:ext cx="1564569" cy="1405610"/>
             </a:xfrm>
@@ -4067,9 +4265,9 @@
               <a:gdLst/>
               <a:ahLst/>
               <a:cxnLst/>
-              <a:rect r="r" b="b" t="t" l="l"/>
+              <a:rect l="l" t="t" r="r" b="b"/>
               <a:pathLst>
-                <a:path h="1405610" w="1564569">
+                <a:path w="1564569" h="1405610">
                   <a:moveTo>
                     <a:pt x="729060" y="228878"/>
                   </a:moveTo>
@@ -4316,13 +4514,14 @@
 </file>
 
 <file path=ppt/slides/slide3.xml><?xml version="1.0" encoding="utf-8"?>
-<p:sld xmlns:p="http://schemas.openxmlformats.org/presentationml/2006/main" xmlns:a="http://schemas.openxmlformats.org/drawingml/2006/main" xmlns:r="http://schemas.openxmlformats.org/officeDocument/2006/relationships">
+<p:sld xmlns:a="http://schemas.openxmlformats.org/drawingml/2006/main" xmlns:r="http://schemas.openxmlformats.org/officeDocument/2006/relationships" xmlns:p="http://schemas.openxmlformats.org/presentationml/2006/main">
   <p:cSld>
     <p:bg>
       <p:bgPr>
         <a:solidFill>
           <a:srgbClr val="172944"/>
         </a:solidFill>
+        <a:effectLst/>
       </p:bgPr>
     </p:bg>
     <p:spTree>
@@ -4341,60 +4540,60 @@
       </p:grpSpPr>
       <p:sp>
         <p:nvSpPr>
-          <p:cNvPr name="AutoShape 2" id="2"/>
+          <p:cNvPr id="2" name="AutoShape 2"/>
           <p:cNvSpPr/>
           <p:nvPr/>
         </p:nvSpPr>
         <p:spPr>
-          <a:xfrm flipV="true">
+          <a:xfrm flipV="1">
             <a:off x="17580241" y="513682"/>
             <a:ext cx="0" cy="354402"/>
           </a:xfrm>
           <a:prstGeom prst="line">
             <a:avLst/>
           </a:prstGeom>
-          <a:ln cap="flat" w="19050">
+          <a:ln w="19050" cap="flat">
             <a:solidFill>
               <a:srgbClr val="FFFFFF"/>
             </a:solidFill>
             <a:prstDash val="solid"/>
-            <a:headEnd type="none" len="sm" w="sm"/>
-            <a:tailEnd type="none" len="sm" w="sm"/>
+            <a:headEnd type="none" w="sm" len="sm"/>
+            <a:tailEnd type="none" w="sm" len="sm"/>
           </a:ln>
         </p:spPr>
       </p:sp>
       <p:sp>
         <p:nvSpPr>
-          <p:cNvPr name="AutoShape 3" id="3"/>
+          <p:cNvPr id="3" name="AutoShape 3"/>
           <p:cNvSpPr/>
           <p:nvPr/>
         </p:nvSpPr>
         <p:spPr>
-          <a:xfrm flipV="true">
+          <a:xfrm flipV="1">
             <a:off x="17692515" y="513682"/>
             <a:ext cx="0" cy="354402"/>
           </a:xfrm>
           <a:prstGeom prst="line">
             <a:avLst/>
           </a:prstGeom>
-          <a:ln cap="flat" w="19050">
+          <a:ln w="19050" cap="flat">
             <a:solidFill>
               <a:srgbClr val="FFFFFF"/>
             </a:solidFill>
             <a:prstDash val="solid"/>
-            <a:headEnd type="none" len="sm" w="sm"/>
-            <a:tailEnd type="none" len="sm" w="sm"/>
+            <a:headEnd type="none" w="sm" len="sm"/>
+            <a:tailEnd type="none" w="sm" len="sm"/>
           </a:ln>
         </p:spPr>
       </p:sp>
       <p:sp>
         <p:nvSpPr>
-          <p:cNvPr name="Freeform 4" id="4"/>
+          <p:cNvPr id="4" name="Freeform 4"/>
           <p:cNvSpPr/>
           <p:nvPr/>
         </p:nvSpPr>
         <p:spPr>
-          <a:xfrm flipH="false" flipV="false" rot="0">
+          <a:xfrm>
             <a:off x="6482526" y="3154900"/>
             <a:ext cx="10804726" cy="3977200"/>
           </a:xfrm>
@@ -4403,9 +4602,9 @@
             <a:gdLst/>
             <a:ahLst/>
             <a:cxnLst/>
-            <a:rect r="r" b="b" t="t" l="l"/>
+            <a:rect l="l" t="t" r="r" b="b"/>
             <a:pathLst>
-              <a:path h="3977200" w="10804726">
+              <a:path w="10804726" h="3977200">
                 <a:moveTo>
                   <a:pt x="0" y="0"/>
                 </a:moveTo>
@@ -4428,15 +4627,15 @@
           <a:blipFill>
             <a:blip r:embed="rId2"/>
             <a:stretch>
-              <a:fillRect l="0" t="0" r="0" b="0"/>
+              <a:fillRect/>
             </a:stretch>
           </a:blipFill>
         </p:spPr>
       </p:sp>
       <p:sp>
         <p:nvSpPr>
-          <p:cNvPr name="TextBox 5" id="5"/>
-          <p:cNvSpPr txBox="true"/>
+          <p:cNvPr id="5" name="TextBox 5"/>
+          <p:cNvSpPr txBox="1"/>
           <p:nvPr/>
         </p:nvSpPr>
         <p:spPr>
@@ -4449,22 +4648,22 @@
           </a:prstGeom>
         </p:spPr>
         <p:txBody>
-          <a:bodyPr anchor="t" rtlCol="false" tIns="0" lIns="0" bIns="0" rIns="0">
+          <a:bodyPr lIns="0" tIns="0" rIns="0" bIns="0" rtlCol="0" anchor="t">
             <a:spAutoFit/>
           </a:bodyPr>
           <a:lstStyle/>
           <a:p>
-            <a:pPr algn="ctr" marL="0" indent="0" lvl="0">
+            <a:pPr marL="0" lvl="0" indent="0" algn="ctr">
               <a:lnSpc>
                 <a:spcPts val="2089"/>
               </a:lnSpc>
             </a:pPr>
             <a:r>
-              <a:rPr lang="en-US" sz="1899" spc="613">
+              <a:rPr lang="en-US" sz="1899" spc="613" dirty="0">
                 <a:solidFill>
                   <a:srgbClr val="E1E1E1"/>
                 </a:solidFill>
-                <a:latin typeface="Josefin Sans Light"/>
+                <a:latin typeface="+mj-lt"/>
                 <a:ea typeface="Josefin Sans Light"/>
                 <a:cs typeface="Josefin Sans Light"/>
                 <a:sym typeface="Josefin Sans Light"/>
@@ -4476,8 +4675,8 @@
       </p:sp>
       <p:sp>
         <p:nvSpPr>
-          <p:cNvPr name="TextBox 6" id="6"/>
-          <p:cNvSpPr txBox="true"/>
+          <p:cNvPr id="6" name="TextBox 6"/>
+          <p:cNvSpPr txBox="1"/>
           <p:nvPr/>
         </p:nvSpPr>
         <p:spPr>
@@ -4490,22 +4689,22 @@
           </a:prstGeom>
         </p:spPr>
         <p:txBody>
-          <a:bodyPr anchor="t" rtlCol="false" tIns="0" lIns="0" bIns="0" rIns="0">
+          <a:bodyPr lIns="0" tIns="0" rIns="0" bIns="0" rtlCol="0" anchor="t">
             <a:spAutoFit/>
           </a:bodyPr>
           <a:lstStyle/>
           <a:p>
-            <a:pPr algn="l" marL="0" indent="0" lvl="0">
+            <a:pPr marL="0" lvl="0" indent="0" algn="l">
               <a:lnSpc>
                 <a:spcPts val="2089"/>
               </a:lnSpc>
             </a:pPr>
             <a:r>
-              <a:rPr lang="en-US" sz="1899" spc="613">
+              <a:rPr lang="en-US" sz="1899" spc="613" dirty="0">
                 <a:solidFill>
                   <a:srgbClr val="E1E1E1"/>
                 </a:solidFill>
-                <a:latin typeface="Josefin Sans Light"/>
+                <a:latin typeface="+mj-lt"/>
                 <a:ea typeface="Josefin Sans Light"/>
                 <a:cs typeface="Josefin Sans Light"/>
                 <a:sym typeface="Josefin Sans Light"/>
@@ -4517,12 +4716,12 @@
       </p:sp>
       <p:sp>
         <p:nvSpPr>
-          <p:cNvPr name="TextBox 7" id="7"/>
-          <p:cNvSpPr txBox="true"/>
+          <p:cNvPr id="7" name="TextBox 7"/>
+          <p:cNvSpPr txBox="1"/>
           <p:nvPr/>
         </p:nvSpPr>
         <p:spPr>
-          <a:xfrm rot="0">
+          <a:xfrm>
             <a:off x="1028700" y="2766139"/>
             <a:ext cx="6492149" cy="450215"/>
           </a:xfrm>
@@ -4531,22 +4730,22 @@
           </a:prstGeom>
         </p:spPr>
         <p:txBody>
-          <a:bodyPr anchor="t" rtlCol="false" tIns="0" lIns="0" bIns="0" rIns="0">
+          <a:bodyPr lIns="0" tIns="0" rIns="0" bIns="0" rtlCol="0" anchor="t">
             <a:spAutoFit/>
           </a:bodyPr>
           <a:lstStyle/>
           <a:p>
-            <a:pPr algn="l" marL="0" indent="0" lvl="0">
+            <a:pPr marL="0" lvl="0" indent="0" algn="l">
               <a:lnSpc>
                 <a:spcPts val="3520"/>
               </a:lnSpc>
             </a:pPr>
             <a:r>
-              <a:rPr lang="en-US" sz="3200">
+              <a:rPr lang="en-US" sz="3200" dirty="0">
                 <a:solidFill>
                   <a:srgbClr val="E1E1E1"/>
                 </a:solidFill>
-                <a:latin typeface="Josefin Sans"/>
+                <a:latin typeface="+mj-lt"/>
                 <a:ea typeface="Josefin Sans"/>
                 <a:cs typeface="Josefin Sans"/>
                 <a:sym typeface="Josefin Sans"/>
@@ -4558,21 +4757,21 @@
       </p:sp>
       <p:sp>
         <p:nvSpPr>
-          <p:cNvPr name="TextBox 8" id="8"/>
-          <p:cNvSpPr txBox="true"/>
+          <p:cNvPr id="8" name="TextBox 8"/>
+          <p:cNvSpPr txBox="1"/>
           <p:nvPr/>
         </p:nvSpPr>
         <p:spPr>
-          <a:xfrm rot="0">
+          <a:xfrm>
             <a:off x="1028700" y="4138933"/>
-            <a:ext cx="5245353" cy="1323238"/>
+            <a:ext cx="5245353" cy="1016689"/>
           </a:xfrm>
           <a:prstGeom prst="rect">
             <a:avLst/>
           </a:prstGeom>
         </p:spPr>
         <p:txBody>
-          <a:bodyPr anchor="t" rtlCol="false" tIns="0" lIns="0" bIns="0" rIns="0">
+          <a:bodyPr lIns="0" tIns="0" rIns="0" bIns="0" rtlCol="0" anchor="t">
             <a:spAutoFit/>
           </a:bodyPr>
           <a:lstStyle/>
@@ -4586,40 +4785,27 @@
               </a:spcBef>
             </a:pPr>
             <a:r>
-              <a:rPr lang="en-US" sz="1904">
+              <a:rPr lang="en-US" sz="1904" dirty="0">
                 <a:solidFill>
                   <a:srgbClr val="FFFFFF"/>
                 </a:solidFill>
-                <a:latin typeface="Open Sans Light"/>
                 <a:ea typeface="Open Sans Light"/>
                 <a:cs typeface="Open Sans Light"/>
                 <a:sym typeface="Open Sans Light"/>
               </a:rPr>
-              <a:t>Gross</a:t>
-            </a:r>
-            <a:r>
-              <a:rPr lang="en-US" sz="1904">
-                <a:solidFill>
-                  <a:srgbClr val="FFFFFF"/>
-                </a:solidFill>
-                <a:latin typeface="Open Sans Light"/>
-                <a:ea typeface="Open Sans Light"/>
-                <a:cs typeface="Open Sans Light"/>
-                <a:sym typeface="Open Sans Light"/>
-              </a:rPr>
-              <a:t> Margin exhibits high monthly volatility throughout the year, reaching a peak of 189.17% in October following its lowest point of 157.28% in July</a:t>
+              <a:t>Gross Margin exhibits high monthly volatility throughout the year, reaching a peak of 189.17% in October following its lowest point of 157.28% in July</a:t>
             </a:r>
           </a:p>
         </p:txBody>
       </p:sp>
       <p:grpSp>
         <p:nvGrpSpPr>
-          <p:cNvPr name="Group 9" id="9"/>
+          <p:cNvPr id="9" name="Group 9"/>
           <p:cNvGrpSpPr/>
           <p:nvPr/>
         </p:nvGrpSpPr>
         <p:grpSpPr>
-          <a:xfrm rot="0">
+          <a:xfrm>
             <a:off x="14253210" y="3825240"/>
             <a:ext cx="1556385" cy="921068"/>
             <a:chOff x="0" y="0"/>
@@ -4628,12 +4814,12 @@
         </p:grpSpPr>
         <p:sp>
           <p:nvSpPr>
-            <p:cNvPr name="Freeform 10" id="10"/>
+            <p:cNvPr id="10" name="Freeform 10"/>
             <p:cNvSpPr/>
             <p:nvPr/>
           </p:nvSpPr>
           <p:spPr>
-            <a:xfrm flipH="false" flipV="false" rot="0">
+            <a:xfrm>
               <a:off x="45795" y="50124"/>
               <a:ext cx="1979627" cy="1127034"/>
             </a:xfrm>
@@ -4642,9 +4828,9 @@
               <a:gdLst/>
               <a:ahLst/>
               <a:cxnLst/>
-              <a:rect r="r" b="b" t="t" l="l"/>
+              <a:rect l="l" t="t" r="r" b="b"/>
               <a:pathLst>
-                <a:path h="1127034" w="1979627">
+                <a:path w="1979627" h="1127034">
                   <a:moveTo>
                     <a:pt x="1093395" y="228006"/>
                   </a:moveTo>
@@ -4924,12 +5110,12 @@
       </p:grpSp>
       <p:grpSp>
         <p:nvGrpSpPr>
-          <p:cNvPr name="Group 11" id="11"/>
+          <p:cNvPr id="11" name="Group 11"/>
           <p:cNvGrpSpPr/>
           <p:nvPr/>
         </p:nvGrpSpPr>
         <p:grpSpPr>
-          <a:xfrm rot="0">
+          <a:xfrm>
             <a:off x="12110085" y="4936808"/>
             <a:ext cx="1223962" cy="963930"/>
             <a:chOff x="0" y="0"/>
@@ -4938,12 +5124,12 @@
         </p:grpSpPr>
         <p:sp>
           <p:nvSpPr>
-            <p:cNvPr name="Freeform 12" id="12"/>
+            <p:cNvPr id="12" name="Freeform 12"/>
             <p:cNvSpPr/>
             <p:nvPr/>
           </p:nvSpPr>
           <p:spPr>
-            <a:xfrm flipH="false" flipV="false" rot="0">
+            <a:xfrm>
               <a:off x="48650" y="49992"/>
               <a:ext cx="1538440" cy="1190965"/>
             </a:xfrm>
@@ -4952,9 +5138,9 @@
               <a:gdLst/>
               <a:ahLst/>
               <a:cxnLst/>
-              <a:rect r="r" b="b" t="t" l="l"/>
+              <a:rect l="l" t="t" r="r" b="b"/>
               <a:pathLst>
-                <a:path h="1190965" w="1538440">
+                <a:path w="1538440" h="1190965">
                   <a:moveTo>
                     <a:pt x="816220" y="153208"/>
                   </a:moveTo>
@@ -5206,13 +5392,14 @@
 </file>
 
 <file path=ppt/slides/slide4.xml><?xml version="1.0" encoding="utf-8"?>
-<p:sld xmlns:p="http://schemas.openxmlformats.org/presentationml/2006/main" xmlns:a="http://schemas.openxmlformats.org/drawingml/2006/main" xmlns:r="http://schemas.openxmlformats.org/officeDocument/2006/relationships">
+<p:sld xmlns:a="http://schemas.openxmlformats.org/drawingml/2006/main" xmlns:r="http://schemas.openxmlformats.org/officeDocument/2006/relationships" xmlns:p="http://schemas.openxmlformats.org/presentationml/2006/main">
   <p:cSld>
     <p:bg>
       <p:bgPr>
         <a:solidFill>
           <a:srgbClr val="172944"/>
         </a:solidFill>
+        <a:effectLst/>
       </p:bgPr>
     </p:bg>
     <p:spTree>
@@ -5231,60 +5418,60 @@
       </p:grpSpPr>
       <p:sp>
         <p:nvSpPr>
-          <p:cNvPr name="AutoShape 2" id="2"/>
+          <p:cNvPr id="2" name="AutoShape 2"/>
           <p:cNvSpPr/>
           <p:nvPr/>
         </p:nvSpPr>
         <p:spPr>
-          <a:xfrm flipV="true">
+          <a:xfrm flipV="1">
             <a:off x="17580241" y="513682"/>
             <a:ext cx="0" cy="354402"/>
           </a:xfrm>
           <a:prstGeom prst="line">
             <a:avLst/>
           </a:prstGeom>
-          <a:ln cap="flat" w="19050">
+          <a:ln w="19050" cap="flat">
             <a:solidFill>
               <a:srgbClr val="FFFFFF"/>
             </a:solidFill>
             <a:prstDash val="solid"/>
-            <a:headEnd type="none" len="sm" w="sm"/>
-            <a:tailEnd type="none" len="sm" w="sm"/>
+            <a:headEnd type="none" w="sm" len="sm"/>
+            <a:tailEnd type="none" w="sm" len="sm"/>
           </a:ln>
         </p:spPr>
       </p:sp>
       <p:sp>
         <p:nvSpPr>
-          <p:cNvPr name="AutoShape 3" id="3"/>
+          <p:cNvPr id="3" name="AutoShape 3"/>
           <p:cNvSpPr/>
           <p:nvPr/>
         </p:nvSpPr>
         <p:spPr>
-          <a:xfrm flipV="true">
+          <a:xfrm flipV="1">
             <a:off x="17692515" y="513682"/>
             <a:ext cx="0" cy="354402"/>
           </a:xfrm>
           <a:prstGeom prst="line">
             <a:avLst/>
           </a:prstGeom>
-          <a:ln cap="flat" w="19050">
+          <a:ln w="19050" cap="flat">
             <a:solidFill>
               <a:srgbClr val="FFFFFF"/>
             </a:solidFill>
             <a:prstDash val="solid"/>
-            <a:headEnd type="none" len="sm" w="sm"/>
-            <a:tailEnd type="none" len="sm" w="sm"/>
+            <a:headEnd type="none" w="sm" len="sm"/>
+            <a:tailEnd type="none" w="sm" len="sm"/>
           </a:ln>
         </p:spPr>
       </p:sp>
       <p:sp>
         <p:nvSpPr>
-          <p:cNvPr name="Freeform 4" id="4"/>
+          <p:cNvPr id="4" name="Freeform 4"/>
           <p:cNvSpPr/>
           <p:nvPr/>
         </p:nvSpPr>
         <p:spPr>
-          <a:xfrm flipH="false" flipV="false" rot="0">
+          <a:xfrm>
             <a:off x="11777705" y="2251060"/>
             <a:ext cx="5481595" cy="5784880"/>
           </a:xfrm>
@@ -5293,9 +5480,9 @@
             <a:gdLst/>
             <a:ahLst/>
             <a:cxnLst/>
-            <a:rect r="r" b="b" t="t" l="l"/>
+            <a:rect l="l" t="t" r="r" b="b"/>
             <a:pathLst>
-              <a:path h="5784880" w="5481595">
+              <a:path w="5481595" h="5784880">
                 <a:moveTo>
                   <a:pt x="0" y="0"/>
                 </a:moveTo>
@@ -5318,15 +5505,15 @@
           <a:blipFill>
             <a:blip r:embed="rId2"/>
             <a:stretch>
-              <a:fillRect l="0" t="0" r="0" b="0"/>
+              <a:fillRect/>
             </a:stretch>
           </a:blipFill>
         </p:spPr>
       </p:sp>
       <p:sp>
         <p:nvSpPr>
-          <p:cNvPr name="TextBox 5" id="5"/>
-          <p:cNvSpPr txBox="true"/>
+          <p:cNvPr id="5" name="TextBox 5"/>
+          <p:cNvSpPr txBox="1"/>
           <p:nvPr/>
         </p:nvSpPr>
         <p:spPr>
@@ -5339,12 +5526,12 @@
           </a:prstGeom>
         </p:spPr>
         <p:txBody>
-          <a:bodyPr anchor="t" rtlCol="false" tIns="0" lIns="0" bIns="0" rIns="0">
+          <a:bodyPr lIns="0" tIns="0" rIns="0" bIns="0" rtlCol="0" anchor="t">
             <a:spAutoFit/>
           </a:bodyPr>
           <a:lstStyle/>
           <a:p>
-            <a:pPr algn="ctr" marL="0" indent="0" lvl="0">
+            <a:pPr marL="0" lvl="0" indent="0" algn="ctr">
               <a:lnSpc>
                 <a:spcPts val="2089"/>
               </a:lnSpc>
@@ -5366,8 +5553,8 @@
       </p:sp>
       <p:sp>
         <p:nvSpPr>
-          <p:cNvPr name="TextBox 6" id="6"/>
-          <p:cNvSpPr txBox="true"/>
+          <p:cNvPr id="6" name="TextBox 6"/>
+          <p:cNvSpPr txBox="1"/>
           <p:nvPr/>
         </p:nvSpPr>
         <p:spPr>
@@ -5380,12 +5567,12 @@
           </a:prstGeom>
         </p:spPr>
         <p:txBody>
-          <a:bodyPr anchor="t" rtlCol="false" tIns="0" lIns="0" bIns="0" rIns="0">
+          <a:bodyPr lIns="0" tIns="0" rIns="0" bIns="0" rtlCol="0" anchor="t">
             <a:spAutoFit/>
           </a:bodyPr>
           <a:lstStyle/>
           <a:p>
-            <a:pPr algn="l" marL="0" indent="0" lvl="0">
+            <a:pPr marL="0" lvl="0" indent="0" algn="l">
               <a:lnSpc>
                 <a:spcPts val="2089"/>
               </a:lnSpc>
@@ -5407,12 +5594,12 @@
       </p:sp>
       <p:sp>
         <p:nvSpPr>
-          <p:cNvPr name="TextBox 7" id="7"/>
-          <p:cNvSpPr txBox="true"/>
+          <p:cNvPr id="7" name="TextBox 7"/>
+          <p:cNvSpPr txBox="1"/>
           <p:nvPr/>
         </p:nvSpPr>
         <p:spPr>
-          <a:xfrm rot="0">
+          <a:xfrm>
             <a:off x="1028700" y="2766139"/>
             <a:ext cx="6492149" cy="450215"/>
           </a:xfrm>
@@ -5421,12 +5608,12 @@
           </a:prstGeom>
         </p:spPr>
         <p:txBody>
-          <a:bodyPr anchor="t" rtlCol="false" tIns="0" lIns="0" bIns="0" rIns="0">
+          <a:bodyPr lIns="0" tIns="0" rIns="0" bIns="0" rtlCol="0" anchor="t">
             <a:spAutoFit/>
           </a:bodyPr>
           <a:lstStyle/>
           <a:p>
-            <a:pPr algn="l" marL="0" indent="0" lvl="0">
+            <a:pPr marL="0" lvl="0" indent="0" algn="l">
               <a:lnSpc>
                 <a:spcPts val="3520"/>
               </a:lnSpc>
@@ -5448,12 +5635,12 @@
       </p:sp>
       <p:sp>
         <p:nvSpPr>
-          <p:cNvPr name="TextBox 8" id="8"/>
-          <p:cNvSpPr txBox="true"/>
+          <p:cNvPr id="8" name="TextBox 8"/>
+          <p:cNvSpPr txBox="1"/>
           <p:nvPr/>
         </p:nvSpPr>
         <p:spPr>
-          <a:xfrm rot="0">
+          <a:xfrm>
             <a:off x="1028700" y="4138933"/>
             <a:ext cx="5245353" cy="3323488"/>
           </a:xfrm>
@@ -5462,12 +5649,12 @@
           </a:prstGeom>
         </p:spPr>
         <p:txBody>
-          <a:bodyPr anchor="t" rtlCol="false" tIns="0" lIns="0" bIns="0" rIns="0">
+          <a:bodyPr lIns="0" tIns="0" rIns="0" bIns="0" rtlCol="0" anchor="t">
             <a:spAutoFit/>
           </a:bodyPr>
           <a:lstStyle/>
           <a:p>
-            <a:pPr algn="l" marL="411074" indent="-205537" lvl="1">
+            <a:pPr marL="411074" lvl="1" indent="-205537" algn="l">
               <a:lnSpc>
                 <a:spcPts val="2665"/>
               </a:lnSpc>
@@ -5484,22 +5671,10 @@
                 <a:cs typeface="Open Sans"/>
                 <a:sym typeface="Open Sans"/>
               </a:rPr>
-              <a:t>Physical stores</a:t>
-            </a:r>
-            <a:r>
-              <a:rPr lang="en-US" sz="1904">
-                <a:solidFill>
-                  <a:srgbClr val="FFFFFF"/>
-                </a:solidFill>
-                <a:latin typeface="Open Sans"/>
-                <a:ea typeface="Open Sans"/>
-                <a:cs typeface="Open Sans"/>
-                <a:sym typeface="Open Sans"/>
-              </a:rPr>
-              <a:t> act as the primary operational driver for the business, generating </a:t>
-            </a:r>
-            <a:r>
-              <a:rPr lang="en-US" b="true" sz="1904">
+              <a:t>Physical stores act as the primary operational driver for the business, generating </a:t>
+            </a:r>
+            <a:r>
+              <a:rPr lang="en-US" sz="1904" b="1">
                 <a:solidFill>
                   <a:srgbClr val="FFFFFF"/>
                 </a:solidFill>
@@ -5529,9 +5704,18 @@
                 <a:spcPts val="2665"/>
               </a:lnSpc>
             </a:pPr>
-          </a:p>
-          <a:p>
-            <a:pPr algn="l" marL="411074" indent="-205537" lvl="1">
+            <a:endParaRPr lang="en-US" sz="1904">
+              <a:solidFill>
+                <a:srgbClr val="FFFFFF"/>
+              </a:solidFill>
+              <a:latin typeface="Open Sans"/>
+              <a:ea typeface="Open Sans"/>
+              <a:cs typeface="Open Sans"/>
+              <a:sym typeface="Open Sans"/>
+            </a:endParaRPr>
+          </a:p>
+          <a:p>
+            <a:pPr marL="411074" lvl="1" indent="-205537" algn="l">
               <a:lnSpc>
                 <a:spcPts val="2665"/>
               </a:lnSpc>
@@ -5551,7 +5735,7 @@
               <a:t>Total bottom-line performance is led by physical retail locations, which contribute </a:t>
             </a:r>
             <a:r>
-              <a:rPr lang="en-US" b="true" sz="1904">
+              <a:rPr lang="en-US" sz="1904" b="1">
                 <a:solidFill>
                   <a:srgbClr val="FFFFFF"/>
                 </a:solidFill>
@@ -5575,7 +5759,7 @@
               <a:t>in Net Profit compared to the </a:t>
             </a:r>
             <a:r>
-              <a:rPr lang="en-US" b="true" sz="1904">
+              <a:rPr lang="en-US" sz="1904" b="1">
                 <a:solidFill>
                   <a:srgbClr val="FFFFFF"/>
                 </a:solidFill>
@@ -5610,13 +5794,14 @@
 </file>
 
 <file path=ppt/slides/slide5.xml><?xml version="1.0" encoding="utf-8"?>
-<p:sld xmlns:p="http://schemas.openxmlformats.org/presentationml/2006/main" xmlns:a="http://schemas.openxmlformats.org/drawingml/2006/main" xmlns:r="http://schemas.openxmlformats.org/officeDocument/2006/relationships">
+<p:sld xmlns:a="http://schemas.openxmlformats.org/drawingml/2006/main" xmlns:r="http://schemas.openxmlformats.org/officeDocument/2006/relationships" xmlns:p="http://schemas.openxmlformats.org/presentationml/2006/main">
   <p:cSld>
     <p:bg>
       <p:bgPr>
         <a:solidFill>
           <a:srgbClr val="172944"/>
         </a:solidFill>
+        <a:effectLst/>
       </p:bgPr>
     </p:bg>
     <p:spTree>
@@ -5635,60 +5820,60 @@
       </p:grpSpPr>
       <p:sp>
         <p:nvSpPr>
-          <p:cNvPr name="AutoShape 2" id="2"/>
+          <p:cNvPr id="2" name="AutoShape 2"/>
           <p:cNvSpPr/>
           <p:nvPr/>
         </p:nvSpPr>
         <p:spPr>
-          <a:xfrm flipV="true">
+          <a:xfrm flipV="1">
             <a:off x="17580241" y="513682"/>
             <a:ext cx="0" cy="354402"/>
           </a:xfrm>
           <a:prstGeom prst="line">
             <a:avLst/>
           </a:prstGeom>
-          <a:ln cap="flat" w="19050">
+          <a:ln w="19050" cap="flat">
             <a:solidFill>
               <a:srgbClr val="FFFFFF"/>
             </a:solidFill>
             <a:prstDash val="solid"/>
-            <a:headEnd type="none" len="sm" w="sm"/>
-            <a:tailEnd type="none" len="sm" w="sm"/>
+            <a:headEnd type="none" w="sm" len="sm"/>
+            <a:tailEnd type="none" w="sm" len="sm"/>
           </a:ln>
         </p:spPr>
       </p:sp>
       <p:sp>
         <p:nvSpPr>
-          <p:cNvPr name="AutoShape 3" id="3"/>
+          <p:cNvPr id="3" name="AutoShape 3"/>
           <p:cNvSpPr/>
           <p:nvPr/>
         </p:nvSpPr>
         <p:spPr>
-          <a:xfrm flipV="true">
+          <a:xfrm flipV="1">
             <a:off x="17692515" y="513682"/>
             <a:ext cx="0" cy="354402"/>
           </a:xfrm>
           <a:prstGeom prst="line">
             <a:avLst/>
           </a:prstGeom>
-          <a:ln cap="flat" w="19050">
+          <a:ln w="19050" cap="flat">
             <a:solidFill>
               <a:srgbClr val="FFFFFF"/>
             </a:solidFill>
             <a:prstDash val="solid"/>
-            <a:headEnd type="none" len="sm" w="sm"/>
-            <a:tailEnd type="none" len="sm" w="sm"/>
+            <a:headEnd type="none" w="sm" len="sm"/>
+            <a:tailEnd type="none" w="sm" len="sm"/>
           </a:ln>
         </p:spPr>
       </p:sp>
       <p:sp>
         <p:nvSpPr>
-          <p:cNvPr name="Freeform 4" id="4"/>
+          <p:cNvPr id="4" name="Freeform 4"/>
           <p:cNvSpPr/>
           <p:nvPr/>
         </p:nvSpPr>
         <p:spPr>
-          <a:xfrm flipH="false" flipV="false" rot="0">
+          <a:xfrm>
             <a:off x="5958041" y="2737564"/>
             <a:ext cx="11301259" cy="5297465"/>
           </a:xfrm>
@@ -5697,9 +5882,9 @@
             <a:gdLst/>
             <a:ahLst/>
             <a:cxnLst/>
-            <a:rect r="r" b="b" t="t" l="l"/>
+            <a:rect l="l" t="t" r="r" b="b"/>
             <a:pathLst>
-              <a:path h="5297465" w="11301259">
+              <a:path w="11301259" h="5297465">
                 <a:moveTo>
                   <a:pt x="0" y="0"/>
                 </a:moveTo>
@@ -5722,15 +5907,15 @@
           <a:blipFill>
             <a:blip r:embed="rId2"/>
             <a:stretch>
-              <a:fillRect l="0" t="0" r="0" b="0"/>
+              <a:fillRect/>
             </a:stretch>
           </a:blipFill>
         </p:spPr>
       </p:sp>
       <p:sp>
         <p:nvSpPr>
-          <p:cNvPr name="TextBox 5" id="5"/>
-          <p:cNvSpPr txBox="true"/>
+          <p:cNvPr id="5" name="TextBox 5"/>
+          <p:cNvSpPr txBox="1"/>
           <p:nvPr/>
         </p:nvSpPr>
         <p:spPr>
@@ -5743,12 +5928,12 @@
           </a:prstGeom>
         </p:spPr>
         <p:txBody>
-          <a:bodyPr anchor="t" rtlCol="false" tIns="0" lIns="0" bIns="0" rIns="0">
+          <a:bodyPr lIns="0" tIns="0" rIns="0" bIns="0" rtlCol="0" anchor="t">
             <a:spAutoFit/>
           </a:bodyPr>
           <a:lstStyle/>
           <a:p>
-            <a:pPr algn="ctr" marL="0" indent="0" lvl="0">
+            <a:pPr marL="0" lvl="0" indent="0" algn="ctr">
               <a:lnSpc>
                 <a:spcPts val="2089"/>
               </a:lnSpc>
@@ -5770,8 +5955,8 @@
       </p:sp>
       <p:sp>
         <p:nvSpPr>
-          <p:cNvPr name="TextBox 6" id="6"/>
-          <p:cNvSpPr txBox="true"/>
+          <p:cNvPr id="6" name="TextBox 6"/>
+          <p:cNvSpPr txBox="1"/>
           <p:nvPr/>
         </p:nvSpPr>
         <p:spPr>
@@ -5784,12 +5969,12 @@
           </a:prstGeom>
         </p:spPr>
         <p:txBody>
-          <a:bodyPr anchor="t" rtlCol="false" tIns="0" lIns="0" bIns="0" rIns="0">
+          <a:bodyPr lIns="0" tIns="0" rIns="0" bIns="0" rtlCol="0" anchor="t">
             <a:spAutoFit/>
           </a:bodyPr>
           <a:lstStyle/>
           <a:p>
-            <a:pPr algn="l" marL="0" indent="0" lvl="0">
+            <a:pPr marL="0" lvl="0" indent="0" algn="l">
               <a:lnSpc>
                 <a:spcPts val="2089"/>
               </a:lnSpc>
@@ -5811,12 +5996,12 @@
       </p:sp>
       <p:sp>
         <p:nvSpPr>
-          <p:cNvPr name="TextBox 7" id="7"/>
-          <p:cNvSpPr txBox="true"/>
+          <p:cNvPr id="7" name="TextBox 7"/>
+          <p:cNvSpPr txBox="1"/>
           <p:nvPr/>
         </p:nvSpPr>
         <p:spPr>
-          <a:xfrm rot="0">
+          <a:xfrm>
             <a:off x="1028700" y="2766139"/>
             <a:ext cx="4929341" cy="888365"/>
           </a:xfrm>
@@ -5825,7 +6010,7 @@
           </a:prstGeom>
         </p:spPr>
         <p:txBody>
-          <a:bodyPr anchor="t" rtlCol="false" tIns="0" lIns="0" bIns="0" rIns="0">
+          <a:bodyPr lIns="0" tIns="0" rIns="0" bIns="0" rtlCol="0" anchor="t">
             <a:spAutoFit/>
           </a:bodyPr>
           <a:lstStyle/>
@@ -5849,22 +6034,31 @@
             </a:r>
           </a:p>
           <a:p>
-            <a:pPr algn="l" marL="0" indent="0" lvl="0">
+            <a:pPr marL="0" lvl="0" indent="0" algn="l">
               <a:lnSpc>
                 <a:spcPts val="3520"/>
               </a:lnSpc>
             </a:pPr>
-          </a:p>
-        </p:txBody>
-      </p:sp>
-      <p:sp>
-        <p:nvSpPr>
-          <p:cNvPr name="TextBox 8" id="8"/>
-          <p:cNvSpPr txBox="true"/>
+            <a:endParaRPr lang="en-US" sz="3200">
+              <a:solidFill>
+                <a:srgbClr val="E1E1E1"/>
+              </a:solidFill>
+              <a:latin typeface="Josefin Sans"/>
+              <a:ea typeface="Josefin Sans"/>
+              <a:cs typeface="Josefin Sans"/>
+              <a:sym typeface="Josefin Sans"/>
+            </a:endParaRPr>
+          </a:p>
+        </p:txBody>
+      </p:sp>
+      <p:sp>
+        <p:nvSpPr>
+          <p:cNvPr id="8" name="TextBox 8"/>
+          <p:cNvSpPr txBox="1"/>
           <p:nvPr/>
         </p:nvSpPr>
         <p:spPr>
-          <a:xfrm rot="0">
+          <a:xfrm>
             <a:off x="1028700" y="4138933"/>
             <a:ext cx="4691216" cy="3323488"/>
           </a:xfrm>
@@ -5873,12 +6067,12 @@
           </a:prstGeom>
         </p:spPr>
         <p:txBody>
-          <a:bodyPr anchor="t" rtlCol="false" tIns="0" lIns="0" bIns="0" rIns="0">
+          <a:bodyPr lIns="0" tIns="0" rIns="0" bIns="0" rtlCol="0" anchor="t">
             <a:spAutoFit/>
           </a:bodyPr>
           <a:lstStyle/>
           <a:p>
-            <a:pPr algn="l" marL="411074" indent="-205537" lvl="1">
+            <a:pPr marL="411074" lvl="1" indent="-205537" algn="l">
               <a:lnSpc>
                 <a:spcPts val="2665"/>
               </a:lnSpc>
@@ -5899,7 +6093,7 @@
             </a:r>
           </a:p>
           <a:p>
-            <a:pPr algn="l" marL="411074" indent="-205537" lvl="1">
+            <a:pPr marL="411074" lvl="1" indent="-205537" algn="l">
               <a:lnSpc>
                 <a:spcPts val="2665"/>
               </a:lnSpc>
@@ -5920,7 +6114,7 @@
             </a:r>
           </a:p>
           <a:p>
-            <a:pPr algn="l" marL="411074" indent="-205537" lvl="1">
+            <a:pPr marL="411074" lvl="1" indent="-205537" algn="l">
               <a:lnSpc>
                 <a:spcPts val="2665"/>
               </a:lnSpc>
@@ -5946,6 +6140,15 @@
                 <a:spcPts val="2665"/>
               </a:lnSpc>
             </a:pPr>
+            <a:endParaRPr lang="en-US" sz="1904">
+              <a:solidFill>
+                <a:srgbClr val="FFFFFF"/>
+              </a:solidFill>
+              <a:latin typeface="Open Sans"/>
+              <a:ea typeface="Open Sans"/>
+              <a:cs typeface="Open Sans"/>
+              <a:sym typeface="Open Sans"/>
+            </a:endParaRPr>
           </a:p>
         </p:txBody>
       </p:sp>
@@ -5958,13 +6161,14 @@
 </file>
 
 <file path=ppt/slides/slide6.xml><?xml version="1.0" encoding="utf-8"?>
-<p:sld xmlns:p="http://schemas.openxmlformats.org/presentationml/2006/main" xmlns:a="http://schemas.openxmlformats.org/drawingml/2006/main" xmlns:r="http://schemas.openxmlformats.org/officeDocument/2006/relationships">
+<p:sld xmlns:a="http://schemas.openxmlformats.org/drawingml/2006/main" xmlns:r="http://schemas.openxmlformats.org/officeDocument/2006/relationships" xmlns:p="http://schemas.openxmlformats.org/presentationml/2006/main">
   <p:cSld>
     <p:bg>
       <p:bgPr>
         <a:solidFill>
           <a:srgbClr val="172944"/>
         </a:solidFill>
+        <a:effectLst/>
       </p:bgPr>
     </p:bg>
     <p:spTree>
@@ -5983,60 +6187,60 @@
       </p:grpSpPr>
       <p:sp>
         <p:nvSpPr>
-          <p:cNvPr name="AutoShape 2" id="2"/>
+          <p:cNvPr id="2" name="AutoShape 2"/>
           <p:cNvSpPr/>
           <p:nvPr/>
         </p:nvSpPr>
         <p:spPr>
-          <a:xfrm flipV="true">
+          <a:xfrm flipV="1">
             <a:off x="17580241" y="513682"/>
             <a:ext cx="0" cy="354402"/>
           </a:xfrm>
           <a:prstGeom prst="line">
             <a:avLst/>
           </a:prstGeom>
-          <a:ln cap="flat" w="19050">
+          <a:ln w="19050" cap="flat">
             <a:solidFill>
               <a:srgbClr val="FFFFFF"/>
             </a:solidFill>
             <a:prstDash val="solid"/>
-            <a:headEnd type="none" len="sm" w="sm"/>
-            <a:tailEnd type="none" len="sm" w="sm"/>
+            <a:headEnd type="none" w="sm" len="sm"/>
+            <a:tailEnd type="none" w="sm" len="sm"/>
           </a:ln>
         </p:spPr>
       </p:sp>
       <p:sp>
         <p:nvSpPr>
-          <p:cNvPr name="AutoShape 3" id="3"/>
+          <p:cNvPr id="3" name="AutoShape 3"/>
           <p:cNvSpPr/>
           <p:nvPr/>
         </p:nvSpPr>
         <p:spPr>
-          <a:xfrm flipV="true">
+          <a:xfrm flipV="1">
             <a:off x="17692515" y="513682"/>
             <a:ext cx="0" cy="354402"/>
           </a:xfrm>
           <a:prstGeom prst="line">
             <a:avLst/>
           </a:prstGeom>
-          <a:ln cap="flat" w="19050">
+          <a:ln w="19050" cap="flat">
             <a:solidFill>
               <a:srgbClr val="FFFFFF"/>
             </a:solidFill>
             <a:prstDash val="solid"/>
-            <a:headEnd type="none" len="sm" w="sm"/>
-            <a:tailEnd type="none" len="sm" w="sm"/>
+            <a:headEnd type="none" w="sm" len="sm"/>
+            <a:tailEnd type="none" w="sm" len="sm"/>
           </a:ln>
         </p:spPr>
       </p:sp>
       <p:sp>
         <p:nvSpPr>
-          <p:cNvPr name="Freeform 4" id="4"/>
+          <p:cNvPr id="4" name="Freeform 4"/>
           <p:cNvSpPr/>
           <p:nvPr/>
         </p:nvSpPr>
         <p:spPr>
-          <a:xfrm flipH="false" flipV="false" rot="0">
+          <a:xfrm>
             <a:off x="5958041" y="2918147"/>
             <a:ext cx="11301259" cy="4803035"/>
           </a:xfrm>
@@ -6045,9 +6249,9 @@
             <a:gdLst/>
             <a:ahLst/>
             <a:cxnLst/>
-            <a:rect r="r" b="b" t="t" l="l"/>
+            <a:rect l="l" t="t" r="r" b="b"/>
             <a:pathLst>
-              <a:path h="4803035" w="11301259">
+              <a:path w="11301259" h="4803035">
                 <a:moveTo>
                   <a:pt x="0" y="0"/>
                 </a:moveTo>
@@ -6070,15 +6274,15 @@
           <a:blipFill>
             <a:blip r:embed="rId2"/>
             <a:stretch>
-              <a:fillRect l="0" t="0" r="0" b="0"/>
+              <a:fillRect/>
             </a:stretch>
           </a:blipFill>
         </p:spPr>
       </p:sp>
       <p:sp>
         <p:nvSpPr>
-          <p:cNvPr name="TextBox 5" id="5"/>
-          <p:cNvSpPr txBox="true"/>
+          <p:cNvPr id="5" name="TextBox 5"/>
+          <p:cNvSpPr txBox="1"/>
           <p:nvPr/>
         </p:nvSpPr>
         <p:spPr>
@@ -6091,12 +6295,12 @@
           </a:prstGeom>
         </p:spPr>
         <p:txBody>
-          <a:bodyPr anchor="t" rtlCol="false" tIns="0" lIns="0" bIns="0" rIns="0">
+          <a:bodyPr lIns="0" tIns="0" rIns="0" bIns="0" rtlCol="0" anchor="t">
             <a:spAutoFit/>
           </a:bodyPr>
           <a:lstStyle/>
           <a:p>
-            <a:pPr algn="ctr" marL="0" indent="0" lvl="0">
+            <a:pPr marL="0" lvl="0" indent="0" algn="ctr">
               <a:lnSpc>
                 <a:spcPts val="2089"/>
               </a:lnSpc>
@@ -6118,8 +6322,8 @@
       </p:sp>
       <p:sp>
         <p:nvSpPr>
-          <p:cNvPr name="TextBox 6" id="6"/>
-          <p:cNvSpPr txBox="true"/>
+          <p:cNvPr id="6" name="TextBox 6"/>
+          <p:cNvSpPr txBox="1"/>
           <p:nvPr/>
         </p:nvSpPr>
         <p:spPr>
@@ -6132,12 +6336,12 @@
           </a:prstGeom>
         </p:spPr>
         <p:txBody>
-          <a:bodyPr anchor="t" rtlCol="false" tIns="0" lIns="0" bIns="0" rIns="0">
+          <a:bodyPr lIns="0" tIns="0" rIns="0" bIns="0" rtlCol="0" anchor="t">
             <a:spAutoFit/>
           </a:bodyPr>
           <a:lstStyle/>
           <a:p>
-            <a:pPr algn="l" marL="0" indent="0" lvl="0">
+            <a:pPr marL="0" lvl="0" indent="0" algn="l">
               <a:lnSpc>
                 <a:spcPts val="2089"/>
               </a:lnSpc>
@@ -6159,12 +6363,12 @@
       </p:sp>
       <p:sp>
         <p:nvSpPr>
-          <p:cNvPr name="TextBox 7" id="7"/>
-          <p:cNvSpPr txBox="true"/>
+          <p:cNvPr id="7" name="TextBox 7"/>
+          <p:cNvSpPr txBox="1"/>
           <p:nvPr/>
         </p:nvSpPr>
         <p:spPr>
-          <a:xfrm rot="0">
+          <a:xfrm>
             <a:off x="1028700" y="2766139"/>
             <a:ext cx="4929341" cy="888365"/>
           </a:xfrm>
@@ -6173,7 +6377,7 @@
           </a:prstGeom>
         </p:spPr>
         <p:txBody>
-          <a:bodyPr anchor="t" rtlCol="false" tIns="0" lIns="0" bIns="0" rIns="0">
+          <a:bodyPr lIns="0" tIns="0" rIns="0" bIns="0" rtlCol="0" anchor="t">
             <a:spAutoFit/>
           </a:bodyPr>
           <a:lstStyle/>
@@ -6197,22 +6401,31 @@
             </a:r>
           </a:p>
           <a:p>
-            <a:pPr algn="l" marL="0" indent="0" lvl="0">
+            <a:pPr marL="0" lvl="0" indent="0" algn="l">
               <a:lnSpc>
                 <a:spcPts val="3520"/>
               </a:lnSpc>
             </a:pPr>
-          </a:p>
-        </p:txBody>
-      </p:sp>
-      <p:sp>
-        <p:nvSpPr>
-          <p:cNvPr name="TextBox 8" id="8"/>
-          <p:cNvSpPr txBox="true"/>
+            <a:endParaRPr lang="en-US" sz="3200">
+              <a:solidFill>
+                <a:srgbClr val="E1E1E1"/>
+              </a:solidFill>
+              <a:latin typeface="Josefin Sans"/>
+              <a:ea typeface="Josefin Sans"/>
+              <a:cs typeface="Josefin Sans"/>
+              <a:sym typeface="Josefin Sans"/>
+            </a:endParaRPr>
+          </a:p>
+        </p:txBody>
+      </p:sp>
+      <p:sp>
+        <p:nvSpPr>
+          <p:cNvPr id="8" name="TextBox 8"/>
+          <p:cNvSpPr txBox="1"/>
           <p:nvPr/>
         </p:nvSpPr>
         <p:spPr>
-          <a:xfrm rot="0">
+          <a:xfrm>
             <a:off x="1028700" y="4138933"/>
             <a:ext cx="4691216" cy="1989988"/>
           </a:xfrm>
@@ -6221,7 +6434,7 @@
           </a:prstGeom>
         </p:spPr>
         <p:txBody>
-          <a:bodyPr anchor="t" rtlCol="false" tIns="0" lIns="0" bIns="0" rIns="0">
+          <a:bodyPr lIns="0" tIns="0" rIns="0" bIns="0" rtlCol="0" anchor="t">
             <a:spAutoFit/>
           </a:bodyPr>
           <a:lstStyle/>
@@ -6244,7 +6457,7 @@
               <a:t>NRG Stockholm is the top-performing location with </a:t>
             </a:r>
             <a:r>
-              <a:rPr lang="en-US" sz="1904" b="true">
+              <a:rPr lang="en-US" sz="1904" b="1">
                 <a:solidFill>
                   <a:srgbClr val="FFFFFF"/>
                 </a:solidFill>
@@ -6268,7 +6481,7 @@
               <a:t> in revenue, leading a highly consistent field where the majority of top-tier stores maintain a narrow performance range between $1.47M and </a:t>
             </a:r>
             <a:r>
-              <a:rPr lang="en-US" sz="1904" b="true">
+              <a:rPr lang="en-US" sz="1904" b="1">
                 <a:solidFill>
                   <a:srgbClr val="FFFFFF"/>
                 </a:solidFill>
@@ -6291,13 +6504,14 @@
 </file>
 
 <file path=ppt/slides/slide7.xml><?xml version="1.0" encoding="utf-8"?>
-<p:sld xmlns:p="http://schemas.openxmlformats.org/presentationml/2006/main" xmlns:a="http://schemas.openxmlformats.org/drawingml/2006/main" xmlns:r="http://schemas.openxmlformats.org/officeDocument/2006/relationships">
+<p:sld xmlns:a="http://schemas.openxmlformats.org/drawingml/2006/main" xmlns:r="http://schemas.openxmlformats.org/officeDocument/2006/relationships" xmlns:p="http://schemas.openxmlformats.org/presentationml/2006/main">
   <p:cSld>
     <p:bg>
       <p:bgPr>
         <a:solidFill>
           <a:srgbClr val="172944"/>
         </a:solidFill>
+        <a:effectLst/>
       </p:bgPr>
     </p:bg>
     <p:spTree>
@@ -6316,56 +6530,56 @@
       </p:grpSpPr>
       <p:sp>
         <p:nvSpPr>
-          <p:cNvPr name="AutoShape 2" id="2"/>
+          <p:cNvPr id="2" name="AutoShape 2"/>
           <p:cNvSpPr/>
           <p:nvPr/>
         </p:nvSpPr>
         <p:spPr>
-          <a:xfrm flipV="true">
+          <a:xfrm flipV="1">
             <a:off x="17580241" y="513682"/>
             <a:ext cx="0" cy="354402"/>
           </a:xfrm>
           <a:prstGeom prst="line">
             <a:avLst/>
           </a:prstGeom>
-          <a:ln cap="flat" w="19050">
+          <a:ln w="19050" cap="flat">
             <a:solidFill>
               <a:srgbClr val="FFFFFF"/>
             </a:solidFill>
             <a:prstDash val="solid"/>
-            <a:headEnd type="none" len="sm" w="sm"/>
-            <a:tailEnd type="none" len="sm" w="sm"/>
+            <a:headEnd type="none" w="sm" len="sm"/>
+            <a:tailEnd type="none" w="sm" len="sm"/>
           </a:ln>
         </p:spPr>
       </p:sp>
       <p:sp>
         <p:nvSpPr>
-          <p:cNvPr name="AutoShape 3" id="3"/>
+          <p:cNvPr id="3" name="AutoShape 3"/>
           <p:cNvSpPr/>
           <p:nvPr/>
         </p:nvSpPr>
         <p:spPr>
-          <a:xfrm flipV="true">
+          <a:xfrm flipV="1">
             <a:off x="17692515" y="513682"/>
             <a:ext cx="0" cy="354402"/>
           </a:xfrm>
           <a:prstGeom prst="line">
             <a:avLst/>
           </a:prstGeom>
-          <a:ln cap="flat" w="19050">
+          <a:ln w="19050" cap="flat">
             <a:solidFill>
               <a:srgbClr val="FFFFFF"/>
             </a:solidFill>
             <a:prstDash val="solid"/>
-            <a:headEnd type="none" len="sm" w="sm"/>
-            <a:tailEnd type="none" len="sm" w="sm"/>
+            <a:headEnd type="none" w="sm" len="sm"/>
+            <a:tailEnd type="none" w="sm" len="sm"/>
           </a:ln>
         </p:spPr>
       </p:sp>
       <p:sp>
         <p:nvSpPr>
-          <p:cNvPr name="TextBox 4" id="4"/>
-          <p:cNvSpPr txBox="true"/>
+          <p:cNvPr id="4" name="TextBox 4"/>
+          <p:cNvSpPr txBox="1"/>
           <p:nvPr/>
         </p:nvSpPr>
         <p:spPr>
@@ -6378,12 +6592,12 @@
           </a:prstGeom>
         </p:spPr>
         <p:txBody>
-          <a:bodyPr anchor="t" rtlCol="false" tIns="0" lIns="0" bIns="0" rIns="0">
+          <a:bodyPr lIns="0" tIns="0" rIns="0" bIns="0" rtlCol="0" anchor="t">
             <a:spAutoFit/>
           </a:bodyPr>
           <a:lstStyle/>
           <a:p>
-            <a:pPr algn="ctr" marL="0" indent="0" lvl="0">
+            <a:pPr marL="0" lvl="0" indent="0" algn="ctr">
               <a:lnSpc>
                 <a:spcPts val="2089"/>
               </a:lnSpc>
@@ -6405,8 +6619,8 @@
       </p:sp>
       <p:sp>
         <p:nvSpPr>
-          <p:cNvPr name="TextBox 5" id="5"/>
-          <p:cNvSpPr txBox="true"/>
+          <p:cNvPr id="5" name="TextBox 5"/>
+          <p:cNvSpPr txBox="1"/>
           <p:nvPr/>
         </p:nvSpPr>
         <p:spPr>
@@ -6419,12 +6633,12 @@
           </a:prstGeom>
         </p:spPr>
         <p:txBody>
-          <a:bodyPr anchor="t" rtlCol="false" tIns="0" lIns="0" bIns="0" rIns="0">
+          <a:bodyPr lIns="0" tIns="0" rIns="0" bIns="0" rtlCol="0" anchor="t">
             <a:spAutoFit/>
           </a:bodyPr>
           <a:lstStyle/>
           <a:p>
-            <a:pPr algn="l" marL="0" indent="0" lvl="0">
+            <a:pPr marL="0" lvl="0" indent="0" algn="l">
               <a:lnSpc>
                 <a:spcPts val="2089"/>
               </a:lnSpc>
@@ -6446,12 +6660,12 @@
       </p:sp>
       <p:sp>
         <p:nvSpPr>
-          <p:cNvPr name="TextBox 6" id="6"/>
-          <p:cNvSpPr txBox="true"/>
+          <p:cNvPr id="6" name="TextBox 6"/>
+          <p:cNvSpPr txBox="1"/>
           <p:nvPr/>
         </p:nvSpPr>
         <p:spPr>
-          <a:xfrm rot="0">
+          <a:xfrm>
             <a:off x="1028700" y="2766139"/>
             <a:ext cx="4929341" cy="450215"/>
           </a:xfrm>
@@ -6460,12 +6674,12 @@
           </a:prstGeom>
         </p:spPr>
         <p:txBody>
-          <a:bodyPr anchor="t" rtlCol="false" tIns="0" lIns="0" bIns="0" rIns="0">
+          <a:bodyPr lIns="0" tIns="0" rIns="0" bIns="0" rtlCol="0" anchor="t">
             <a:spAutoFit/>
           </a:bodyPr>
           <a:lstStyle/>
           <a:p>
-            <a:pPr algn="l" marL="0" indent="0" lvl="0">
+            <a:pPr marL="0" lvl="0" indent="0" algn="l">
               <a:lnSpc>
                 <a:spcPts val="3520"/>
               </a:lnSpc>
@@ -6487,12 +6701,12 @@
       </p:sp>
       <p:sp>
         <p:nvSpPr>
-          <p:cNvPr name="TextBox 7" id="7"/>
-          <p:cNvSpPr txBox="true"/>
+          <p:cNvPr id="7" name="TextBox 7"/>
+          <p:cNvSpPr txBox="1"/>
           <p:nvPr/>
         </p:nvSpPr>
         <p:spPr>
-          <a:xfrm rot="0">
+          <a:xfrm>
             <a:off x="1028700" y="4138933"/>
             <a:ext cx="4691216" cy="4323613"/>
           </a:xfrm>
@@ -6501,7 +6715,7 @@
           </a:prstGeom>
         </p:spPr>
         <p:txBody>
-          <a:bodyPr anchor="t" rtlCol="false" tIns="0" lIns="0" bIns="0" rIns="0">
+          <a:bodyPr lIns="0" tIns="0" rIns="0" bIns="0" rtlCol="0" anchor="t">
             <a:spAutoFit/>
           </a:bodyPr>
           <a:lstStyle/>
@@ -6544,7 +6758,7 @@
             </a:r>
           </a:p>
           <a:p>
-            <a:pPr algn="l" marL="411074" indent="-205537" lvl="1">
+            <a:pPr marL="411074" lvl="1" indent="-205537" algn="l">
               <a:lnSpc>
                 <a:spcPts val="2665"/>
               </a:lnSpc>
@@ -6565,7 +6779,7 @@
             </a:r>
           </a:p>
           <a:p>
-            <a:pPr algn="l" marL="411074" indent="-205537" lvl="1">
+            <a:pPr marL="411074" lvl="1" indent="-205537" algn="l">
               <a:lnSpc>
                 <a:spcPts val="2665"/>
               </a:lnSpc>
@@ -6586,7 +6800,7 @@
             </a:r>
           </a:p>
           <a:p>
-            <a:pPr algn="l" marL="411074" indent="-205537" lvl="1">
+            <a:pPr marL="411074" lvl="1" indent="-205537" algn="l">
               <a:lnSpc>
                 <a:spcPts val="2665"/>
               </a:lnSpc>
@@ -6612,55 +6826,48 @@
                 <a:spcPts val="2665"/>
               </a:lnSpc>
             </a:pPr>
-          </a:p>
-        </p:txBody>
-      </p:sp>
-      <p:sp>
-        <p:nvSpPr>
-          <p:cNvPr name="Freeform 8" id="8"/>
-          <p:cNvSpPr/>
+            <a:endParaRPr lang="en-US" sz="1904">
+              <a:solidFill>
+                <a:srgbClr val="FFFFFF"/>
+              </a:solidFill>
+              <a:latin typeface="Open Sans"/>
+              <a:ea typeface="Open Sans"/>
+              <a:cs typeface="Open Sans"/>
+              <a:sym typeface="Open Sans"/>
+            </a:endParaRPr>
+          </a:p>
+        </p:txBody>
+      </p:sp>
+      <p:pic>
+        <p:nvPicPr>
+          <p:cNvPr id="18" name="Picture 17">
+            <a:extLst>
+              <a:ext uri="{FF2B5EF4-FFF2-40B4-BE49-F238E27FC236}">
+                <a16:creationId xmlns:a16="http://schemas.microsoft.com/office/drawing/2014/main" id="{20555352-F20A-CC1A-B75B-571403C05E31}"/>
+              </a:ext>
+            </a:extLst>
+          </p:cNvPr>
+          <p:cNvPicPr>
+            <a:picLocks noChangeAspect="1"/>
+          </p:cNvPicPr>
           <p:nvPr/>
-        </p:nvSpPr>
-        <p:spPr>
-          <a:xfrm flipH="false" flipV="false" rot="0">
-            <a:off x="7782204" y="2869520"/>
-            <a:ext cx="9477096" cy="5448605"/>
-          </a:xfrm>
-          <a:custGeom>
+        </p:nvPicPr>
+        <p:blipFill>
+          <a:blip r:embed="rId2"/>
+          <a:stretch>
+            <a:fillRect/>
+          </a:stretch>
+        </p:blipFill>
+        <p:spPr>
+          <a:xfrm>
+            <a:off x="7924800" y="2646150"/>
+            <a:ext cx="9054790" cy="5469149"/>
+          </a:xfrm>
+          <a:prstGeom prst="rect">
             <a:avLst/>
-            <a:gdLst/>
-            <a:ahLst/>
-            <a:cxnLst/>
-            <a:rect r="r" b="b" t="t" l="l"/>
-            <a:pathLst>
-              <a:path h="5448605" w="9477096">
-                <a:moveTo>
-                  <a:pt x="0" y="0"/>
-                </a:moveTo>
-                <a:lnTo>
-                  <a:pt x="9477096" y="0"/>
-                </a:lnTo>
-                <a:lnTo>
-                  <a:pt x="9477096" y="5448606"/>
-                </a:lnTo>
-                <a:lnTo>
-                  <a:pt x="0" y="5448606"/>
-                </a:lnTo>
-                <a:lnTo>
-                  <a:pt x="0" y="0"/>
-                </a:lnTo>
-                <a:close/>
-              </a:path>
-            </a:pathLst>
-          </a:custGeom>
-          <a:blipFill>
-            <a:blip r:embed="rId2"/>
-            <a:stretch>
-              <a:fillRect l="0" t="0" r="0" b="0"/>
-            </a:stretch>
-          </a:blipFill>
-        </p:spPr>
-      </p:sp>
+          </a:prstGeom>
+        </p:spPr>
+      </p:pic>
     </p:spTree>
   </p:cSld>
   <p:clrMapOvr>
@@ -6670,13 +6877,14 @@
 </file>
 
 <file path=ppt/slides/slide8.xml><?xml version="1.0" encoding="utf-8"?>
-<p:sld xmlns:p="http://schemas.openxmlformats.org/presentationml/2006/main" xmlns:a="http://schemas.openxmlformats.org/drawingml/2006/main" xmlns:r="http://schemas.openxmlformats.org/officeDocument/2006/relationships">
+<p:sld xmlns:a="http://schemas.openxmlformats.org/drawingml/2006/main" xmlns:r="http://schemas.openxmlformats.org/officeDocument/2006/relationships" xmlns:p="http://schemas.openxmlformats.org/presentationml/2006/main">
   <p:cSld>
     <p:bg>
       <p:bgPr>
         <a:solidFill>
           <a:srgbClr val="172944"/>
         </a:solidFill>
+        <a:effectLst/>
       </p:bgPr>
     </p:bg>
     <p:spTree>
@@ -6695,60 +6903,60 @@
       </p:grpSpPr>
       <p:sp>
         <p:nvSpPr>
-          <p:cNvPr name="AutoShape 2" id="2"/>
+          <p:cNvPr id="2" name="AutoShape 2"/>
           <p:cNvSpPr/>
           <p:nvPr/>
         </p:nvSpPr>
         <p:spPr>
-          <a:xfrm flipV="true">
+          <a:xfrm flipV="1">
             <a:off x="17580241" y="513682"/>
             <a:ext cx="0" cy="354402"/>
           </a:xfrm>
           <a:prstGeom prst="line">
             <a:avLst/>
           </a:prstGeom>
-          <a:ln cap="flat" w="19050">
+          <a:ln w="19050" cap="flat">
             <a:solidFill>
               <a:srgbClr val="FFFFFF"/>
             </a:solidFill>
             <a:prstDash val="solid"/>
-            <a:headEnd type="none" len="sm" w="sm"/>
-            <a:tailEnd type="none" len="sm" w="sm"/>
+            <a:headEnd type="none" w="sm" len="sm"/>
+            <a:tailEnd type="none" w="sm" len="sm"/>
           </a:ln>
         </p:spPr>
       </p:sp>
       <p:sp>
         <p:nvSpPr>
-          <p:cNvPr name="AutoShape 3" id="3"/>
+          <p:cNvPr id="3" name="AutoShape 3"/>
           <p:cNvSpPr/>
           <p:nvPr/>
         </p:nvSpPr>
         <p:spPr>
-          <a:xfrm flipV="true">
+          <a:xfrm flipV="1">
             <a:off x="17692515" y="513682"/>
             <a:ext cx="0" cy="354402"/>
           </a:xfrm>
           <a:prstGeom prst="line">
             <a:avLst/>
           </a:prstGeom>
-          <a:ln cap="flat" w="19050">
+          <a:ln w="19050" cap="flat">
             <a:solidFill>
               <a:srgbClr val="FFFFFF"/>
             </a:solidFill>
             <a:prstDash val="solid"/>
-            <a:headEnd type="none" len="sm" w="sm"/>
-            <a:tailEnd type="none" len="sm" w="sm"/>
+            <a:headEnd type="none" w="sm" len="sm"/>
+            <a:tailEnd type="none" w="sm" len="sm"/>
           </a:ln>
         </p:spPr>
       </p:sp>
       <p:sp>
         <p:nvSpPr>
-          <p:cNvPr name="Freeform 4" id="4"/>
+          <p:cNvPr id="4" name="Freeform 4"/>
           <p:cNvSpPr/>
           <p:nvPr/>
         </p:nvSpPr>
         <p:spPr>
-          <a:xfrm flipH="false" flipV="false" rot="0">
+          <a:xfrm>
             <a:off x="12092298" y="1028700"/>
             <a:ext cx="5167002" cy="7784560"/>
           </a:xfrm>
@@ -6757,9 +6965,9 @@
             <a:gdLst/>
             <a:ahLst/>
             <a:cxnLst/>
-            <a:rect r="r" b="b" t="t" l="l"/>
+            <a:rect l="l" t="t" r="r" b="b"/>
             <a:pathLst>
-              <a:path h="7784560" w="5167002">
+              <a:path w="5167002" h="7784560">
                 <a:moveTo>
                   <a:pt x="0" y="0"/>
                 </a:moveTo>
@@ -6782,15 +6990,15 @@
           <a:blipFill>
             <a:blip r:embed="rId2"/>
             <a:stretch>
-              <a:fillRect l="0" t="0" r="0" b="0"/>
+              <a:fillRect/>
             </a:stretch>
           </a:blipFill>
         </p:spPr>
       </p:sp>
       <p:sp>
         <p:nvSpPr>
-          <p:cNvPr name="TextBox 5" id="5"/>
-          <p:cNvSpPr txBox="true"/>
+          <p:cNvPr id="5" name="TextBox 5"/>
+          <p:cNvSpPr txBox="1"/>
           <p:nvPr/>
         </p:nvSpPr>
         <p:spPr>
@@ -6803,12 +7011,12 @@
           </a:prstGeom>
         </p:spPr>
         <p:txBody>
-          <a:bodyPr anchor="t" rtlCol="false" tIns="0" lIns="0" bIns="0" rIns="0">
+          <a:bodyPr lIns="0" tIns="0" rIns="0" bIns="0" rtlCol="0" anchor="t">
             <a:spAutoFit/>
           </a:bodyPr>
           <a:lstStyle/>
           <a:p>
-            <a:pPr algn="ctr" marL="0" indent="0" lvl="0">
+            <a:pPr marL="0" lvl="0" indent="0" algn="ctr">
               <a:lnSpc>
                 <a:spcPts val="2089"/>
               </a:lnSpc>
@@ -6830,8 +7038,8 @@
       </p:sp>
       <p:sp>
         <p:nvSpPr>
-          <p:cNvPr name="TextBox 6" id="6"/>
-          <p:cNvSpPr txBox="true"/>
+          <p:cNvPr id="6" name="TextBox 6"/>
+          <p:cNvSpPr txBox="1"/>
           <p:nvPr/>
         </p:nvSpPr>
         <p:spPr>
@@ -6844,12 +7052,12 @@
           </a:prstGeom>
         </p:spPr>
         <p:txBody>
-          <a:bodyPr anchor="t" rtlCol="false" tIns="0" lIns="0" bIns="0" rIns="0">
+          <a:bodyPr lIns="0" tIns="0" rIns="0" bIns="0" rtlCol="0" anchor="t">
             <a:spAutoFit/>
           </a:bodyPr>
           <a:lstStyle/>
           <a:p>
-            <a:pPr algn="l" marL="0" indent="0" lvl="0">
+            <a:pPr marL="0" lvl="0" indent="0" algn="l">
               <a:lnSpc>
                 <a:spcPts val="2089"/>
               </a:lnSpc>
@@ -6871,12 +7079,12 @@
       </p:sp>
       <p:sp>
         <p:nvSpPr>
-          <p:cNvPr name="TextBox 7" id="7"/>
-          <p:cNvSpPr txBox="true"/>
+          <p:cNvPr id="7" name="TextBox 7"/>
+          <p:cNvSpPr txBox="1"/>
           <p:nvPr/>
         </p:nvSpPr>
         <p:spPr>
-          <a:xfrm rot="0">
+          <a:xfrm>
             <a:off x="2970718" y="2685365"/>
             <a:ext cx="4691216" cy="4990363"/>
           </a:xfrm>
@@ -6885,12 +7093,12 @@
           </a:prstGeom>
         </p:spPr>
         <p:txBody>
-          <a:bodyPr anchor="t" rtlCol="false" tIns="0" lIns="0" bIns="0" rIns="0">
+          <a:bodyPr lIns="0" tIns="0" rIns="0" bIns="0" rtlCol="0" anchor="t">
             <a:spAutoFit/>
           </a:bodyPr>
           <a:lstStyle/>
           <a:p>
-            <a:pPr algn="l" marL="411074" indent="-205537" lvl="1">
+            <a:pPr marL="411074" lvl="1" indent="-205537" algn="l">
               <a:lnSpc>
                 <a:spcPts val="2665"/>
               </a:lnSpc>
@@ -6911,7 +7119,7 @@
             </a:r>
           </a:p>
           <a:p>
-            <a:pPr algn="l" marL="411074" indent="-205537" lvl="1">
+            <a:pPr marL="411074" lvl="1" indent="-205537" algn="l">
               <a:lnSpc>
                 <a:spcPts val="2665"/>
               </a:lnSpc>
@@ -6928,23 +7136,11 @@
                 <a:cs typeface="Open Sans"/>
                 <a:sym typeface="Open Sans"/>
               </a:rPr>
-              <a:t>Uneven s</a:t>
-            </a:r>
-            <a:r>
-              <a:rPr lang="en-US" sz="1904">
-                <a:solidFill>
-                  <a:srgbClr val="FFFFFF"/>
-                </a:solidFill>
-                <a:latin typeface="Open Sans"/>
-                <a:ea typeface="Open Sans"/>
-                <a:cs typeface="Open Sans"/>
-                <a:sym typeface="Open Sans"/>
-              </a:rPr>
-              <a:t>tore resilience: Best performer is NRG Online Norway (~ -$3.77M), while NRG Online Sweden &amp; NRG Trondheim face highest downside risk (~ -$5M+)</a:t>
-            </a:r>
-          </a:p>
-          <a:p>
-            <a:pPr algn="l" marL="411074" indent="-205537" lvl="1">
+              <a:t>Uneven store resilience: Best performer is NRG Online Norway (~ -$3.77M), while NRG Online Sweden &amp; NRG Trondheim face highest downside risk (~ -$5M+)</a:t>
+            </a:r>
+          </a:p>
+          <a:p>
+            <a:pPr marL="411074" lvl="1" indent="-205537" algn="l">
               <a:lnSpc>
                 <a:spcPts val="2665"/>
               </a:lnSpc>
@@ -6970,10 +7166,444 @@
                 <a:spcPts val="2665"/>
               </a:lnSpc>
             </a:pPr>
+            <a:endParaRPr lang="en-US" sz="1904">
+              <a:solidFill>
+                <a:srgbClr val="FFFFFF"/>
+              </a:solidFill>
+              <a:latin typeface="Open Sans"/>
+              <a:ea typeface="Open Sans"/>
+              <a:cs typeface="Open Sans"/>
+              <a:sym typeface="Open Sans"/>
+            </a:endParaRPr>
           </a:p>
         </p:txBody>
       </p:sp>
     </p:spTree>
+  </p:cSld>
+  <p:clrMapOvr>
+    <a:masterClrMapping/>
+  </p:clrMapOvr>
+</p:sld>
+</file>
+
+<file path=ppt/slides/slide9.xml><?xml version="1.0" encoding="utf-8"?>
+<p:sld xmlns:a="http://schemas.openxmlformats.org/drawingml/2006/main" xmlns:r="http://schemas.openxmlformats.org/officeDocument/2006/relationships" xmlns:p="http://schemas.openxmlformats.org/presentationml/2006/main">
+  <p:cSld>
+    <p:bg>
+      <p:bgPr>
+        <a:solidFill>
+          <a:srgbClr val="172944"/>
+        </a:solidFill>
+        <a:effectLst/>
+      </p:bgPr>
+    </p:bg>
+    <p:spTree>
+      <p:nvGrpSpPr>
+        <p:cNvPr id="1" name="">
+          <a:extLst>
+            <a:ext uri="{FF2B5EF4-FFF2-40B4-BE49-F238E27FC236}">
+              <a16:creationId xmlns:a16="http://schemas.microsoft.com/office/drawing/2014/main" id="{166BECD6-AFE9-3503-71DE-A6C8D070B8E3}"/>
+            </a:ext>
+          </a:extLst>
+        </p:cNvPr>
+        <p:cNvGrpSpPr/>
+        <p:nvPr/>
+      </p:nvGrpSpPr>
+      <p:grpSpPr>
+        <a:xfrm>
+          <a:off x="0" y="0"/>
+          <a:ext cx="0" cy="0"/>
+          <a:chOff x="0" y="0"/>
+          <a:chExt cx="0" cy="0"/>
+        </a:xfrm>
+      </p:grpSpPr>
+      <p:sp>
+        <p:nvSpPr>
+          <p:cNvPr id="2" name="AutoShape 2">
+            <a:extLst>
+              <a:ext uri="{FF2B5EF4-FFF2-40B4-BE49-F238E27FC236}">
+                <a16:creationId xmlns:a16="http://schemas.microsoft.com/office/drawing/2014/main" id="{05BBD870-0FDE-413D-A53C-EF5499150FE1}"/>
+              </a:ext>
+            </a:extLst>
+          </p:cNvPr>
+          <p:cNvSpPr/>
+          <p:nvPr/>
+        </p:nvSpPr>
+        <p:spPr>
+          <a:xfrm flipV="1">
+            <a:off x="17580241" y="513682"/>
+            <a:ext cx="0" cy="354402"/>
+          </a:xfrm>
+          <a:prstGeom prst="line">
+            <a:avLst/>
+          </a:prstGeom>
+          <a:ln w="19050" cap="flat">
+            <a:solidFill>
+              <a:srgbClr val="FFFFFF"/>
+            </a:solidFill>
+            <a:prstDash val="solid"/>
+            <a:headEnd type="none" w="sm" len="sm"/>
+            <a:tailEnd type="none" w="sm" len="sm"/>
+          </a:ln>
+        </p:spPr>
+      </p:sp>
+      <p:sp>
+        <p:nvSpPr>
+          <p:cNvPr id="3" name="AutoShape 3">
+            <a:extLst>
+              <a:ext uri="{FF2B5EF4-FFF2-40B4-BE49-F238E27FC236}">
+                <a16:creationId xmlns:a16="http://schemas.microsoft.com/office/drawing/2014/main" id="{939CFFC3-1356-07D5-295C-AEC67FF701F3}"/>
+              </a:ext>
+            </a:extLst>
+          </p:cNvPr>
+          <p:cNvSpPr/>
+          <p:nvPr/>
+        </p:nvSpPr>
+        <p:spPr>
+          <a:xfrm flipV="1">
+            <a:off x="17692515" y="513682"/>
+            <a:ext cx="0" cy="354402"/>
+          </a:xfrm>
+          <a:prstGeom prst="line">
+            <a:avLst/>
+          </a:prstGeom>
+          <a:ln w="19050" cap="flat">
+            <a:solidFill>
+              <a:srgbClr val="FFFFFF"/>
+            </a:solidFill>
+            <a:prstDash val="solid"/>
+            <a:headEnd type="none" w="sm" len="sm"/>
+            <a:tailEnd type="none" w="sm" len="sm"/>
+          </a:ln>
+        </p:spPr>
+      </p:sp>
+      <p:sp>
+        <p:nvSpPr>
+          <p:cNvPr id="5" name="TextBox 5">
+            <a:extLst>
+              <a:ext uri="{FF2B5EF4-FFF2-40B4-BE49-F238E27FC236}">
+                <a16:creationId xmlns:a16="http://schemas.microsoft.com/office/drawing/2014/main" id="{0CF10E9B-EFFE-6FE7-F19B-44AEF96F8D45}"/>
+              </a:ext>
+            </a:extLst>
+          </p:cNvPr>
+          <p:cNvSpPr txBox="1"/>
+          <p:nvPr/>
+        </p:nvSpPr>
+        <p:spPr>
+          <a:xfrm rot="-5400000">
+            <a:off x="15108912" y="5007610"/>
+            <a:ext cx="5064457" cy="271780"/>
+          </a:xfrm>
+          <a:prstGeom prst="rect">
+            <a:avLst/>
+          </a:prstGeom>
+        </p:spPr>
+        <p:txBody>
+          <a:bodyPr lIns="0" tIns="0" rIns="0" bIns="0" rtlCol="0" anchor="t">
+            <a:spAutoFit/>
+          </a:bodyPr>
+          <a:lstStyle/>
+          <a:p>
+            <a:pPr marL="0" lvl="0" indent="0" algn="ctr">
+              <a:lnSpc>
+                <a:spcPts val="2089"/>
+              </a:lnSpc>
+            </a:pPr>
+            <a:r>
+              <a:rPr lang="en-US" sz="1899" spc="613">
+                <a:solidFill>
+                  <a:srgbClr val="E1E1E1"/>
+                </a:solidFill>
+                <a:latin typeface="Josefin Sans Light"/>
+                <a:ea typeface="Josefin Sans Light"/>
+                <a:cs typeface="Josefin Sans Light"/>
+                <a:sym typeface="Josefin Sans Light"/>
+              </a:rPr>
+              <a:t>NORDIC RETAIL GROUP</a:t>
+            </a:r>
+          </a:p>
+        </p:txBody>
+      </p:sp>
+      <p:sp>
+        <p:nvSpPr>
+          <p:cNvPr id="6" name="TextBox 6">
+            <a:extLst>
+              <a:ext uri="{FF2B5EF4-FFF2-40B4-BE49-F238E27FC236}">
+                <a16:creationId xmlns:a16="http://schemas.microsoft.com/office/drawing/2014/main" id="{5E0EC7D7-7313-07BA-569D-6155794235E5}"/>
+              </a:ext>
+            </a:extLst>
+          </p:cNvPr>
+          <p:cNvSpPr txBox="1"/>
+          <p:nvPr/>
+        </p:nvSpPr>
+        <p:spPr>
+          <a:xfrm rot="-5400000">
+            <a:off x="17035528" y="9031816"/>
+            <a:ext cx="1211224" cy="271780"/>
+          </a:xfrm>
+          <a:prstGeom prst="rect">
+            <a:avLst/>
+          </a:prstGeom>
+        </p:spPr>
+        <p:txBody>
+          <a:bodyPr lIns="0" tIns="0" rIns="0" bIns="0" rtlCol="0" anchor="t">
+            <a:spAutoFit/>
+          </a:bodyPr>
+          <a:lstStyle/>
+          <a:p>
+            <a:pPr marL="0" lvl="0" indent="0" algn="l">
+              <a:lnSpc>
+                <a:spcPts val="2089"/>
+              </a:lnSpc>
+            </a:pPr>
+            <a:r>
+              <a:rPr lang="en-US" sz="1899" spc="613">
+                <a:solidFill>
+                  <a:srgbClr val="E1E1E1"/>
+                </a:solidFill>
+                <a:latin typeface="Josefin Sans Light"/>
+                <a:ea typeface="Josefin Sans Light"/>
+                <a:cs typeface="Josefin Sans Light"/>
+                <a:sym typeface="Josefin Sans Light"/>
+              </a:rPr>
+              <a:t>2026</a:t>
+            </a:r>
+          </a:p>
+        </p:txBody>
+      </p:sp>
+      <p:sp>
+        <p:nvSpPr>
+          <p:cNvPr id="8" name="Title 7">
+            <a:extLst>
+              <a:ext uri="{FF2B5EF4-FFF2-40B4-BE49-F238E27FC236}">
+                <a16:creationId xmlns:a16="http://schemas.microsoft.com/office/drawing/2014/main" id="{0222E634-3E1E-AF68-9E45-DED43B0C9EB9}"/>
+              </a:ext>
+            </a:extLst>
+          </p:cNvPr>
+          <p:cNvSpPr>
+            <a:spLocks noGrp="1"/>
+          </p:cNvSpPr>
+          <p:nvPr>
+            <p:ph type="title"/>
+          </p:nvPr>
+        </p:nvSpPr>
+        <p:spPr>
+          <a:xfrm>
+            <a:off x="5029200" y="1028700"/>
+            <a:ext cx="8229600" cy="1143000"/>
+          </a:xfrm>
+        </p:spPr>
+        <p:txBody>
+          <a:bodyPr/>
+          <a:lstStyle/>
+          <a:p>
+            <a:r>
+              <a:rPr lang="en-US" dirty="0">
+                <a:solidFill>
+                  <a:schemeClr val="bg1"/>
+                </a:solidFill>
+              </a:rPr>
+              <a:t>Recommendation &amp; Action</a:t>
+            </a:r>
+          </a:p>
+        </p:txBody>
+      </p:sp>
+      <p:sp>
+        <p:nvSpPr>
+          <p:cNvPr id="9" name="Content Placeholder 8">
+            <a:extLst>
+              <a:ext uri="{FF2B5EF4-FFF2-40B4-BE49-F238E27FC236}">
+                <a16:creationId xmlns:a16="http://schemas.microsoft.com/office/drawing/2014/main" id="{96AC73F0-2340-5A43-60A6-3AE717A463B6}"/>
+              </a:ext>
+            </a:extLst>
+          </p:cNvPr>
+          <p:cNvSpPr>
+            <a:spLocks noGrp="1"/>
+          </p:cNvSpPr>
+          <p:nvPr>
+            <p:ph idx="1"/>
+          </p:nvPr>
+        </p:nvSpPr>
+        <p:spPr>
+          <a:xfrm>
+            <a:off x="2620645" y="2552700"/>
+            <a:ext cx="13046710" cy="5920582"/>
+          </a:xfrm>
+        </p:spPr>
+        <p:txBody>
+          <a:bodyPr>
+            <a:normAutofit lnSpcReduction="10000"/>
+          </a:bodyPr>
+          <a:lstStyle/>
+          <a:p>
+            <a:pPr marL="514350" indent="-514350">
+              <a:buFont typeface="+mj-lt"/>
+              <a:buAutoNum type="arabicPeriod"/>
+            </a:pPr>
+            <a:r>
+              <a:rPr lang="en-US" b="1" dirty="0">
+                <a:solidFill>
+                  <a:schemeClr val="bg1"/>
+                </a:solidFill>
+              </a:rPr>
+              <a:t>Cost Optimization (Priority)</a:t>
+            </a:r>
+            <a:br>
+              <a:rPr lang="en-US" b="1" dirty="0">
+                <a:solidFill>
+                  <a:schemeClr val="bg1"/>
+                </a:solidFill>
+              </a:rPr>
+            </a:br>
+            <a:r>
+              <a:rPr lang="en-US" dirty="0">
+                <a:solidFill>
+                  <a:schemeClr val="bg1"/>
+                </a:solidFill>
+              </a:rPr>
+              <a:t>Optimize operational efficiency during the volatile first half of the year to replicate the sustained high-profit stability observed in the third quarter.</a:t>
+            </a:r>
+          </a:p>
+          <a:p>
+            <a:pPr marL="514350" indent="-514350">
+              <a:buFont typeface="+mj-lt"/>
+              <a:buAutoNum type="arabicPeriod"/>
+            </a:pPr>
+            <a:r>
+              <a:rPr lang="en-US" b="1" dirty="0">
+                <a:solidFill>
+                  <a:schemeClr val="bg1"/>
+                </a:solidFill>
+              </a:rPr>
+              <a:t>Improve Operational Efficiency</a:t>
+            </a:r>
+            <a:br>
+              <a:rPr lang="en-US" b="1" dirty="0">
+                <a:solidFill>
+                  <a:schemeClr val="bg1"/>
+                </a:solidFill>
+              </a:rPr>
+            </a:br>
+            <a:r>
+              <a:rPr lang="en-US" dirty="0">
+                <a:solidFill>
+                  <a:schemeClr val="bg1"/>
+                </a:solidFill>
+              </a:rPr>
+              <a:t>Align expenses with revenue performance </a:t>
+            </a:r>
+            <a:br>
+              <a:rPr lang="en-US" dirty="0">
+                <a:solidFill>
+                  <a:schemeClr val="bg1"/>
+                </a:solidFill>
+              </a:rPr>
+            </a:br>
+            <a:r>
+              <a:rPr lang="en-US" dirty="0">
+                <a:solidFill>
+                  <a:schemeClr val="bg1"/>
+                </a:solidFill>
+              </a:rPr>
+              <a:t>Replicate strategies from top-performing stores </a:t>
+            </a:r>
+          </a:p>
+          <a:p>
+            <a:pPr marL="514350" indent="-514350">
+              <a:buFont typeface="+mj-lt"/>
+              <a:buAutoNum type="arabicPeriod"/>
+            </a:pPr>
+            <a:r>
+              <a:rPr lang="en-US" b="1" dirty="0">
+                <a:solidFill>
+                  <a:schemeClr val="bg1"/>
+                </a:solidFill>
+              </a:rPr>
+              <a:t>Strengthen Business Channels</a:t>
+            </a:r>
+            <a:br>
+              <a:rPr lang="en-US" b="1" dirty="0">
+                <a:solidFill>
+                  <a:schemeClr val="bg1"/>
+                </a:solidFill>
+              </a:rPr>
+            </a:br>
+            <a:r>
+              <a:rPr lang="en-US" dirty="0">
+                <a:solidFill>
+                  <a:schemeClr val="bg1"/>
+                </a:solidFill>
+              </a:rPr>
+              <a:t>Improve performance of underperforming channels (e-commerce) </a:t>
+            </a:r>
+            <a:br>
+              <a:rPr lang="en-US" dirty="0">
+                <a:solidFill>
+                  <a:schemeClr val="bg1"/>
+                </a:solidFill>
+              </a:rPr>
+            </a:br>
+            <a:r>
+              <a:rPr lang="en-US" dirty="0">
+                <a:solidFill>
+                  <a:schemeClr val="bg1"/>
+                </a:solidFill>
+              </a:rPr>
+              <a:t>Optimize investment allocation across channels </a:t>
+            </a:r>
+          </a:p>
+          <a:p>
+            <a:pPr marL="514350" indent="-514350">
+              <a:buFont typeface="+mj-lt"/>
+              <a:buAutoNum type="arabicPeriod"/>
+            </a:pPr>
+            <a:r>
+              <a:rPr lang="en-US" b="1" dirty="0">
+                <a:solidFill>
+                  <a:schemeClr val="bg1"/>
+                </a:solidFill>
+              </a:rPr>
+              <a:t>Scenario-Based Planning</a:t>
+            </a:r>
+            <a:br>
+              <a:rPr lang="en-US" b="1" dirty="0">
+                <a:solidFill>
+                  <a:schemeClr val="bg1"/>
+                </a:solidFill>
+              </a:rPr>
+            </a:br>
+            <a:r>
+              <a:rPr lang="en-US" dirty="0">
+                <a:solidFill>
+                  <a:schemeClr val="bg1"/>
+                </a:solidFill>
+              </a:rPr>
+              <a:t>Use scenario analysis for budgeting and forecasting </a:t>
+            </a:r>
+            <a:br>
+              <a:rPr lang="en-US" dirty="0">
+                <a:solidFill>
+                  <a:schemeClr val="bg1"/>
+                </a:solidFill>
+              </a:rPr>
+            </a:br>
+            <a:r>
+              <a:rPr lang="en-US" dirty="0">
+                <a:solidFill>
+                  <a:schemeClr val="bg1"/>
+                </a:solidFill>
+              </a:rPr>
+              <a:t>Focus on closing the ~$5M gap to Best Case</a:t>
+            </a:r>
+          </a:p>
+        </p:txBody>
+      </p:sp>
+    </p:spTree>
+    <p:extLst>
+      <p:ext uri="{BB962C8B-B14F-4D97-AF65-F5344CB8AC3E}">
+        <p14:creationId xmlns:p14="http://schemas.microsoft.com/office/powerpoint/2010/main" val="1134590727"/>
+      </p:ext>
+    </p:extLst>
   </p:cSld>
   <p:clrMapOvr>
     <a:masterClrMapping/>
